--- a/docs/pptx/whole/ritu-linsubhr-ratio-sideeffect_10pct.pptx
+++ b/docs/pptx/whole/ritu-linsubhr-ratio-sideeffect_10pct.pptx
@@ -2443,7 +2443,7 @@
           </p:nvSpPr>
           <p:spPr>
             <a:xfrm>
-              <a:off x="955490" y="2073503"/>
+              <a:off x="957589" y="2073503"/>
               <a:ext cx="0" cy="3649639"/>
             </a:xfrm>
             <a:custGeom>
@@ -2486,7 +2486,7 @@
           </p:nvSpPr>
           <p:spPr>
             <a:xfrm>
-              <a:off x="1892768" y="2073503"/>
+              <a:off x="1893867" y="2073503"/>
               <a:ext cx="0" cy="3649639"/>
             </a:xfrm>
             <a:custGeom>
@@ -2529,7 +2529,7 @@
           </p:nvSpPr>
           <p:spPr>
             <a:xfrm>
-              <a:off x="2830046" y="2073503"/>
+              <a:off x="2830144" y="2073503"/>
               <a:ext cx="0" cy="3649639"/>
             </a:xfrm>
             <a:custGeom>
@@ -2572,7 +2572,7 @@
           </p:nvSpPr>
           <p:spPr>
             <a:xfrm>
-              <a:off x="3767323" y="2073503"/>
+              <a:off x="3766422" y="2073503"/>
               <a:ext cx="0" cy="3649639"/>
             </a:xfrm>
             <a:custGeom>
@@ -2615,7 +2615,7 @@
           </p:nvSpPr>
           <p:spPr>
             <a:xfrm>
-              <a:off x="4704601" y="2073503"/>
+              <a:off x="4702700" y="2073503"/>
               <a:ext cx="0" cy="3649639"/>
             </a:xfrm>
             <a:custGeom>
@@ -2658,7 +2658,7 @@
           </p:nvSpPr>
           <p:spPr>
             <a:xfrm>
-              <a:off x="5641878" y="2073503"/>
+              <a:off x="5638978" y="2073503"/>
               <a:ext cx="0" cy="3649639"/>
             </a:xfrm>
             <a:custGeom>
@@ -2701,7 +2701,7 @@
           </p:nvSpPr>
           <p:spPr>
             <a:xfrm>
-              <a:off x="6579156" y="2073503"/>
+              <a:off x="6575256" y="2073503"/>
               <a:ext cx="0" cy="3649639"/>
             </a:xfrm>
             <a:custGeom>
@@ -2744,7 +2744,7 @@
           </p:nvSpPr>
           <p:spPr>
             <a:xfrm>
-              <a:off x="7516433" y="2073503"/>
+              <a:off x="7511534" y="2073503"/>
               <a:ext cx="0" cy="3649639"/>
             </a:xfrm>
             <a:custGeom>
@@ -2787,7 +2787,7 @@
           </p:nvSpPr>
           <p:spPr>
             <a:xfrm>
-              <a:off x="8453711" y="2073503"/>
+              <a:off x="8447812" y="2073503"/>
               <a:ext cx="0" cy="3649639"/>
             </a:xfrm>
             <a:custGeom>
@@ -3045,7 +3045,7 @@
           </p:nvSpPr>
           <p:spPr>
             <a:xfrm>
-              <a:off x="1424129" y="2073503"/>
+              <a:off x="1425728" y="2073503"/>
               <a:ext cx="0" cy="3649639"/>
             </a:xfrm>
             <a:custGeom>
@@ -3088,7 +3088,7 @@
           </p:nvSpPr>
           <p:spPr>
             <a:xfrm>
-              <a:off x="2361407" y="2073503"/>
+              <a:off x="2362006" y="2073503"/>
               <a:ext cx="0" cy="3649639"/>
             </a:xfrm>
             <a:custGeom>
@@ -3131,7 +3131,7 @@
           </p:nvSpPr>
           <p:spPr>
             <a:xfrm>
-              <a:off x="3298684" y="2073503"/>
+              <a:off x="3298283" y="2073503"/>
               <a:ext cx="0" cy="3649639"/>
             </a:xfrm>
             <a:custGeom>
@@ -3174,7 +3174,7 @@
           </p:nvSpPr>
           <p:spPr>
             <a:xfrm>
-              <a:off x="4235962" y="2073503"/>
+              <a:off x="4234561" y="2073503"/>
               <a:ext cx="0" cy="3649639"/>
             </a:xfrm>
             <a:custGeom>
@@ -3217,7 +3217,7 @@
           </p:nvSpPr>
           <p:spPr>
             <a:xfrm>
-              <a:off x="5173239" y="2073503"/>
+              <a:off x="5170839" y="2073503"/>
               <a:ext cx="0" cy="3649639"/>
             </a:xfrm>
             <a:custGeom>
@@ -3260,7 +3260,7 @@
           </p:nvSpPr>
           <p:spPr>
             <a:xfrm>
-              <a:off x="6110517" y="2073503"/>
+              <a:off x="6107117" y="2073503"/>
               <a:ext cx="0" cy="3649639"/>
             </a:xfrm>
             <a:custGeom>
@@ -3303,7 +3303,7 @@
           </p:nvSpPr>
           <p:spPr>
             <a:xfrm>
-              <a:off x="7047795" y="2073503"/>
+              <a:off x="7043395" y="2073503"/>
               <a:ext cx="0" cy="3649639"/>
             </a:xfrm>
             <a:custGeom>
@@ -3346,7 +3346,7 @@
           </p:nvSpPr>
           <p:spPr>
             <a:xfrm>
-              <a:off x="7985072" y="2073503"/>
+              <a:off x="7979673" y="2073503"/>
               <a:ext cx="0" cy="3649639"/>
             </a:xfrm>
             <a:custGeom>
@@ -3390,554 +3390,551 @@
           <p:spPr>
             <a:xfrm>
               <a:off x="1172049" y="2073503"/>
-              <a:ext cx="7090630" cy="3452784"/>
+              <a:ext cx="7090630" cy="3454519"/>
             </a:xfrm>
             <a:custGeom>
               <a:avLst/>
               <a:pathLst>
-                <a:path w="7090630" h="3452784">
+                <a:path w="7090630" h="3454519">
                   <a:moveTo>
-                    <a:pt x="1418365" y="0"/>
+                    <a:pt x="1448463" y="0"/>
                   </a:moveTo>
                   <a:lnTo>
-                    <a:pt x="1432450" y="41595"/>
-                  </a:lnTo>
-                  <a:lnTo>
-                    <a:pt x="1504073" y="240864"/>
-                  </a:lnTo>
-                  <a:lnTo>
-                    <a:pt x="1575695" y="428596"/>
-                  </a:lnTo>
-                  <a:lnTo>
-                    <a:pt x="1647318" y="605461"/>
-                  </a:lnTo>
-                  <a:lnTo>
-                    <a:pt x="1718940" y="772087"/>
-                  </a:lnTo>
-                  <a:lnTo>
-                    <a:pt x="1790563" y="929067"/>
-                  </a:lnTo>
-                  <a:lnTo>
-                    <a:pt x="1862185" y="1076959"/>
-                  </a:lnTo>
-                  <a:lnTo>
-                    <a:pt x="1933808" y="1216289"/>
-                  </a:lnTo>
-                  <a:lnTo>
-                    <a:pt x="2005430" y="1347554"/>
-                  </a:lnTo>
-                  <a:lnTo>
-                    <a:pt x="2077053" y="1471219"/>
-                  </a:lnTo>
-                  <a:lnTo>
-                    <a:pt x="2148675" y="1587726"/>
-                  </a:lnTo>
-                  <a:lnTo>
-                    <a:pt x="2220298" y="1697488"/>
-                  </a:lnTo>
-                  <a:lnTo>
-                    <a:pt x="2291920" y="1800895"/>
-                  </a:lnTo>
-                  <a:lnTo>
-                    <a:pt x="2363543" y="1898317"/>
-                  </a:lnTo>
-                  <a:lnTo>
-                    <a:pt x="2435165" y="1990098"/>
-                  </a:lnTo>
-                  <a:lnTo>
-                    <a:pt x="2506788" y="2076567"/>
-                  </a:lnTo>
-                  <a:lnTo>
-                    <a:pt x="2578410" y="2158029"/>
-                  </a:lnTo>
-                  <a:lnTo>
-                    <a:pt x="2650033" y="2234776"/>
-                  </a:lnTo>
-                  <a:lnTo>
-                    <a:pt x="2721655" y="2307080"/>
-                  </a:lnTo>
-                  <a:lnTo>
-                    <a:pt x="2793278" y="2375198"/>
-                  </a:lnTo>
-                  <a:lnTo>
-                    <a:pt x="2864901" y="2439372"/>
-                  </a:lnTo>
-                  <a:lnTo>
-                    <a:pt x="2936523" y="2499832"/>
-                  </a:lnTo>
-                  <a:lnTo>
-                    <a:pt x="3008146" y="2556791"/>
-                  </a:lnTo>
-                  <a:lnTo>
-                    <a:pt x="3079768" y="2610453"/>
-                  </a:lnTo>
-                  <a:lnTo>
-                    <a:pt x="3151391" y="2656031"/>
-                  </a:lnTo>
-                  <a:lnTo>
-                    <a:pt x="3223013" y="2668723"/>
-                  </a:lnTo>
-                  <a:lnTo>
-                    <a:pt x="3294636" y="2681220"/>
-                  </a:lnTo>
-                  <a:lnTo>
-                    <a:pt x="3366258" y="2693525"/>
-                  </a:lnTo>
-                  <a:lnTo>
-                    <a:pt x="3437881" y="2705642"/>
-                  </a:lnTo>
-                  <a:lnTo>
-                    <a:pt x="3509503" y="2717573"/>
-                  </a:lnTo>
-                  <a:lnTo>
-                    <a:pt x="3581126" y="2729321"/>
-                  </a:lnTo>
-                  <a:lnTo>
-                    <a:pt x="3652748" y="2740888"/>
-                  </a:lnTo>
-                  <a:lnTo>
-                    <a:pt x="3724371" y="2752279"/>
-                  </a:lnTo>
-                  <a:lnTo>
-                    <a:pt x="3795993" y="2763495"/>
-                  </a:lnTo>
-                  <a:lnTo>
-                    <a:pt x="3867616" y="2774539"/>
-                  </a:lnTo>
-                  <a:lnTo>
-                    <a:pt x="3939238" y="2785413"/>
-                  </a:lnTo>
-                  <a:lnTo>
-                    <a:pt x="4010861" y="2796121"/>
-                  </a:lnTo>
-                  <a:lnTo>
-                    <a:pt x="4082483" y="2806664"/>
-                  </a:lnTo>
-                  <a:lnTo>
-                    <a:pt x="4154106" y="2817046"/>
-                  </a:lnTo>
-                  <a:lnTo>
-                    <a:pt x="4225729" y="2827269"/>
-                  </a:lnTo>
-                  <a:lnTo>
-                    <a:pt x="4297351" y="2837335"/>
-                  </a:lnTo>
-                  <a:lnTo>
-                    <a:pt x="4368974" y="2847247"/>
-                  </a:lnTo>
-                  <a:lnTo>
-                    <a:pt x="4440596" y="2857006"/>
-                  </a:lnTo>
-                  <a:lnTo>
-                    <a:pt x="4512219" y="2866616"/>
-                  </a:lnTo>
-                  <a:lnTo>
-                    <a:pt x="4583841" y="2876079"/>
-                  </a:lnTo>
-                  <a:lnTo>
-                    <a:pt x="4655464" y="2885397"/>
-                  </a:lnTo>
-                  <a:lnTo>
-                    <a:pt x="4727086" y="2894571"/>
-                  </a:lnTo>
-                  <a:lnTo>
-                    <a:pt x="4798709" y="2903605"/>
-                  </a:lnTo>
-                  <a:lnTo>
-                    <a:pt x="4870331" y="2912501"/>
-                  </a:lnTo>
-                  <a:lnTo>
-                    <a:pt x="4941954" y="2921260"/>
-                  </a:lnTo>
-                  <a:lnTo>
-                    <a:pt x="5013576" y="2929885"/>
-                  </a:lnTo>
-                  <a:lnTo>
-                    <a:pt x="5085199" y="2938377"/>
-                  </a:lnTo>
-                  <a:lnTo>
-                    <a:pt x="5156821" y="2946740"/>
-                  </a:lnTo>
-                  <a:lnTo>
-                    <a:pt x="5228444" y="2954974"/>
-                  </a:lnTo>
-                  <a:lnTo>
-                    <a:pt x="5300066" y="2963081"/>
-                  </a:lnTo>
-                  <a:lnTo>
-                    <a:pt x="5371689" y="2971065"/>
-                  </a:lnTo>
-                  <a:lnTo>
-                    <a:pt x="5443311" y="2978926"/>
-                  </a:lnTo>
-                  <a:lnTo>
-                    <a:pt x="5514934" y="2986667"/>
-                  </a:lnTo>
-                  <a:lnTo>
-                    <a:pt x="5586557" y="2994289"/>
-                  </a:lnTo>
-                  <a:lnTo>
-                    <a:pt x="5658179" y="3001794"/>
-                  </a:lnTo>
-                  <a:lnTo>
-                    <a:pt x="5729802" y="3009183"/>
-                  </a:lnTo>
-                  <a:lnTo>
-                    <a:pt x="5801424" y="3016460"/>
-                  </a:lnTo>
-                  <a:lnTo>
-                    <a:pt x="5873047" y="3023625"/>
-                  </a:lnTo>
-                  <a:lnTo>
-                    <a:pt x="5944669" y="3030680"/>
-                  </a:lnTo>
-                  <a:lnTo>
-                    <a:pt x="6016292" y="3037627"/>
-                  </a:lnTo>
-                  <a:lnTo>
-                    <a:pt x="6087914" y="3044468"/>
-                  </a:lnTo>
-                  <a:lnTo>
-                    <a:pt x="6159537" y="3051203"/>
-                  </a:lnTo>
-                  <a:lnTo>
-                    <a:pt x="6231159" y="3057836"/>
-                  </a:lnTo>
-                  <a:lnTo>
-                    <a:pt x="6302782" y="3064366"/>
-                  </a:lnTo>
-                  <a:lnTo>
-                    <a:pt x="6374404" y="3070797"/>
-                  </a:lnTo>
-                  <a:lnTo>
-                    <a:pt x="6446027" y="3077129"/>
-                  </a:lnTo>
-                  <a:lnTo>
-                    <a:pt x="6517649" y="3083364"/>
-                  </a:lnTo>
-                  <a:lnTo>
-                    <a:pt x="6589272" y="3089503"/>
-                  </a:lnTo>
-                  <a:lnTo>
-                    <a:pt x="6660894" y="3095548"/>
-                  </a:lnTo>
-                  <a:lnTo>
-                    <a:pt x="6732517" y="3101500"/>
-                  </a:lnTo>
-                  <a:lnTo>
-                    <a:pt x="6804139" y="3107361"/>
-                  </a:lnTo>
-                  <a:lnTo>
-                    <a:pt x="6875762" y="3113133"/>
-                  </a:lnTo>
-                  <a:lnTo>
-                    <a:pt x="6947385" y="3118815"/>
-                  </a:lnTo>
-                  <a:lnTo>
-                    <a:pt x="7019007" y="3124411"/>
-                  </a:lnTo>
-                  <a:lnTo>
-                    <a:pt x="7090630" y="3129921"/>
-                  </a:lnTo>
-                  <a:lnTo>
-                    <a:pt x="7090630" y="3452784"/>
-                  </a:lnTo>
-                  <a:lnTo>
-                    <a:pt x="7019007" y="3450882"/>
-                  </a:lnTo>
-                  <a:lnTo>
-                    <a:pt x="6947385" y="3448862"/>
-                  </a:lnTo>
-                  <a:lnTo>
-                    <a:pt x="6875762" y="3446718"/>
-                  </a:lnTo>
-                  <a:lnTo>
-                    <a:pt x="6804139" y="3444443"/>
-                  </a:lnTo>
-                  <a:lnTo>
-                    <a:pt x="6732517" y="3442028"/>
-                  </a:lnTo>
-                  <a:lnTo>
-                    <a:pt x="6660894" y="3439465"/>
-                  </a:lnTo>
-                  <a:lnTo>
-                    <a:pt x="6589272" y="3436744"/>
-                  </a:lnTo>
-                  <a:lnTo>
-                    <a:pt x="6517649" y="3433855"/>
-                  </a:lnTo>
-                  <a:lnTo>
-                    <a:pt x="6446027" y="3430790"/>
-                  </a:lnTo>
-                  <a:lnTo>
-                    <a:pt x="6374404" y="3427536"/>
-                  </a:lnTo>
-                  <a:lnTo>
-                    <a:pt x="6302782" y="3424082"/>
-                  </a:lnTo>
-                  <a:lnTo>
-                    <a:pt x="6231159" y="3420415"/>
-                  </a:lnTo>
-                  <a:lnTo>
-                    <a:pt x="6159537" y="3416524"/>
-                  </a:lnTo>
-                  <a:lnTo>
-                    <a:pt x="6087914" y="3412393"/>
-                  </a:lnTo>
-                  <a:lnTo>
-                    <a:pt x="6016292" y="3408008"/>
-                  </a:lnTo>
-                  <a:lnTo>
-                    <a:pt x="5944669" y="3403354"/>
-                  </a:lnTo>
-                  <a:lnTo>
-                    <a:pt x="5873047" y="3398415"/>
-                  </a:lnTo>
-                  <a:lnTo>
-                    <a:pt x="5801424" y="3393171"/>
-                  </a:lnTo>
-                  <a:lnTo>
-                    <a:pt x="5729802" y="3387605"/>
-                  </a:lnTo>
-                  <a:lnTo>
-                    <a:pt x="5658179" y="3381698"/>
-                  </a:lnTo>
-                  <a:lnTo>
-                    <a:pt x="5586557" y="3375427"/>
-                  </a:lnTo>
-                  <a:lnTo>
-                    <a:pt x="5514934" y="3368771"/>
-                  </a:lnTo>
-                  <a:lnTo>
-                    <a:pt x="5443311" y="3361706"/>
-                  </a:lnTo>
-                  <a:lnTo>
-                    <a:pt x="5371689" y="3354207"/>
-                  </a:lnTo>
-                  <a:lnTo>
-                    <a:pt x="5300066" y="3346247"/>
-                  </a:lnTo>
-                  <a:lnTo>
-                    <a:pt x="5228444" y="3337798"/>
-                  </a:lnTo>
-                  <a:lnTo>
-                    <a:pt x="5156821" y="3328830"/>
-                  </a:lnTo>
-                  <a:lnTo>
-                    <a:pt x="5085199" y="3319310"/>
-                  </a:lnTo>
-                  <a:lnTo>
-                    <a:pt x="5013576" y="3309206"/>
-                  </a:lnTo>
-                  <a:lnTo>
-                    <a:pt x="4941954" y="3298481"/>
-                  </a:lnTo>
-                  <a:lnTo>
-                    <a:pt x="4870331" y="3287097"/>
-                  </a:lnTo>
-                  <a:lnTo>
-                    <a:pt x="4798709" y="3275013"/>
-                  </a:lnTo>
-                  <a:lnTo>
-                    <a:pt x="4727086" y="3262187"/>
-                  </a:lnTo>
-                  <a:lnTo>
-                    <a:pt x="4655464" y="3248573"/>
-                  </a:lnTo>
-                  <a:lnTo>
-                    <a:pt x="4583841" y="3234122"/>
-                  </a:lnTo>
-                  <a:lnTo>
-                    <a:pt x="4512219" y="3218783"/>
-                  </a:lnTo>
-                  <a:lnTo>
-                    <a:pt x="4440596" y="3202501"/>
-                  </a:lnTo>
-                  <a:lnTo>
-                    <a:pt x="4368974" y="3185219"/>
-                  </a:lnTo>
-                  <a:lnTo>
-                    <a:pt x="4297351" y="3166876"/>
-                  </a:lnTo>
-                  <a:lnTo>
-                    <a:pt x="4225729" y="3147404"/>
-                  </a:lnTo>
-                  <a:lnTo>
-                    <a:pt x="4154106" y="3126737"/>
-                  </a:lnTo>
-                  <a:lnTo>
-                    <a:pt x="4082483" y="3104799"/>
-                  </a:lnTo>
-                  <a:lnTo>
-                    <a:pt x="4010861" y="3081514"/>
-                  </a:lnTo>
-                  <a:lnTo>
-                    <a:pt x="3939238" y="3056798"/>
-                  </a:lnTo>
-                  <a:lnTo>
-                    <a:pt x="3867616" y="3030563"/>
-                  </a:lnTo>
-                  <a:lnTo>
-                    <a:pt x="3795993" y="3002715"/>
-                  </a:lnTo>
-                  <a:lnTo>
-                    <a:pt x="3724371" y="2973157"/>
-                  </a:lnTo>
-                  <a:lnTo>
-                    <a:pt x="3652748" y="2941782"/>
-                  </a:lnTo>
-                  <a:lnTo>
-                    <a:pt x="3581126" y="2908480"/>
-                  </a:lnTo>
-                  <a:lnTo>
-                    <a:pt x="3509503" y="2873131"/>
-                  </a:lnTo>
-                  <a:lnTo>
-                    <a:pt x="3437881" y="2835610"/>
-                  </a:lnTo>
-                  <a:lnTo>
-                    <a:pt x="3366258" y="2795783"/>
-                  </a:lnTo>
-                  <a:lnTo>
-                    <a:pt x="3294636" y="2753509"/>
-                  </a:lnTo>
-                  <a:lnTo>
-                    <a:pt x="3223013" y="2708638"/>
-                  </a:lnTo>
-                  <a:lnTo>
-                    <a:pt x="3151391" y="2661009"/>
-                  </a:lnTo>
-                  <a:lnTo>
-                    <a:pt x="3079768" y="2643142"/>
-                  </a:lnTo>
-                  <a:lnTo>
-                    <a:pt x="3008146" y="2630052"/>
-                  </a:lnTo>
-                  <a:lnTo>
-                    <a:pt x="2936523" y="2616758"/>
-                  </a:lnTo>
-                  <a:lnTo>
-                    <a:pt x="2864901" y="2603257"/>
-                  </a:lnTo>
-                  <a:lnTo>
-                    <a:pt x="2793278" y="2589546"/>
-                  </a:lnTo>
-                  <a:lnTo>
-                    <a:pt x="2721655" y="2575621"/>
-                  </a:lnTo>
-                  <a:lnTo>
-                    <a:pt x="2650033" y="2561480"/>
-                  </a:lnTo>
-                  <a:lnTo>
-                    <a:pt x="2578410" y="2547118"/>
-                  </a:lnTo>
-                  <a:lnTo>
-                    <a:pt x="2506788" y="2532533"/>
-                  </a:lnTo>
-                  <a:lnTo>
-                    <a:pt x="2435165" y="2517721"/>
-                  </a:lnTo>
-                  <a:lnTo>
-                    <a:pt x="2363543" y="2502678"/>
-                  </a:lnTo>
-                  <a:lnTo>
-                    <a:pt x="2291920" y="2487400"/>
-                  </a:lnTo>
-                  <a:lnTo>
-                    <a:pt x="2220298" y="2471885"/>
-                  </a:lnTo>
-                  <a:lnTo>
-                    <a:pt x="2148675" y="2456128"/>
-                  </a:lnTo>
-                  <a:lnTo>
-                    <a:pt x="2077053" y="2440126"/>
-                  </a:lnTo>
-                  <a:lnTo>
-                    <a:pt x="2005430" y="2423875"/>
-                  </a:lnTo>
-                  <a:lnTo>
-                    <a:pt x="1933808" y="2407370"/>
-                  </a:lnTo>
-                  <a:lnTo>
-                    <a:pt x="1862185" y="2390609"/>
-                  </a:lnTo>
-                  <a:lnTo>
-                    <a:pt x="1790563" y="2373587"/>
-                  </a:lnTo>
-                  <a:lnTo>
-                    <a:pt x="1718940" y="2356299"/>
-                  </a:lnTo>
-                  <a:lnTo>
-                    <a:pt x="1647318" y="2338742"/>
-                  </a:lnTo>
-                  <a:lnTo>
-                    <a:pt x="1575695" y="2320912"/>
-                  </a:lnTo>
-                  <a:lnTo>
-                    <a:pt x="1504073" y="2302805"/>
-                  </a:lnTo>
-                  <a:lnTo>
-                    <a:pt x="1432450" y="2284415"/>
-                  </a:lnTo>
-                  <a:lnTo>
-                    <a:pt x="1360827" y="2265739"/>
-                  </a:lnTo>
-                  <a:lnTo>
-                    <a:pt x="1289205" y="2246772"/>
-                  </a:lnTo>
-                  <a:lnTo>
-                    <a:pt x="1217582" y="2227509"/>
-                  </a:lnTo>
-                  <a:lnTo>
-                    <a:pt x="1145960" y="2207947"/>
-                  </a:lnTo>
-                  <a:lnTo>
-                    <a:pt x="1074337" y="2188080"/>
-                  </a:lnTo>
-                  <a:lnTo>
-                    <a:pt x="1002715" y="2167904"/>
-                  </a:lnTo>
-                  <a:lnTo>
-                    <a:pt x="931092" y="2147414"/>
-                  </a:lnTo>
-                  <a:lnTo>
-                    <a:pt x="859470" y="2126604"/>
-                  </a:lnTo>
-                  <a:lnTo>
-                    <a:pt x="787847" y="2105471"/>
-                  </a:lnTo>
-                  <a:lnTo>
-                    <a:pt x="716225" y="2084008"/>
-                  </a:lnTo>
-                  <a:lnTo>
-                    <a:pt x="644602" y="2062211"/>
-                  </a:lnTo>
-                  <a:lnTo>
-                    <a:pt x="572980" y="2040075"/>
-                  </a:lnTo>
-                  <a:lnTo>
-                    <a:pt x="501357" y="2017594"/>
-                  </a:lnTo>
-                  <a:lnTo>
-                    <a:pt x="429735" y="1994763"/>
-                  </a:lnTo>
-                  <a:lnTo>
-                    <a:pt x="358112" y="1971576"/>
-                  </a:lnTo>
-                  <a:lnTo>
-                    <a:pt x="286490" y="1948029"/>
-                  </a:lnTo>
-                  <a:lnTo>
-                    <a:pt x="214867" y="1924114"/>
-                  </a:lnTo>
-                  <a:lnTo>
-                    <a:pt x="143245" y="1899828"/>
-                  </a:lnTo>
-                  <a:lnTo>
-                    <a:pt x="71622" y="1875163"/>
-                  </a:lnTo>
-                  <a:lnTo>
-                    <a:pt x="0" y="1850114"/>
+                    <a:pt x="1504073" y="161385"/>
+                  </a:lnTo>
+                  <a:lnTo>
+                    <a:pt x="1575695" y="357002"/>
+                  </a:lnTo>
+                  <a:lnTo>
+                    <a:pt x="1647318" y="541102"/>
+                  </a:lnTo>
+                  <a:lnTo>
+                    <a:pt x="1718940" y="714362"/>
+                  </a:lnTo>
+                  <a:lnTo>
+                    <a:pt x="1790563" y="877421"/>
+                  </a:lnTo>
+                  <a:lnTo>
+                    <a:pt x="1862185" y="1030879"/>
+                  </a:lnTo>
+                  <a:lnTo>
+                    <a:pt x="1933808" y="1175301"/>
+                  </a:lnTo>
+                  <a:lnTo>
+                    <a:pt x="2005430" y="1311220"/>
+                  </a:lnTo>
+                  <a:lnTo>
+                    <a:pt x="2077053" y="1439136"/>
+                  </a:lnTo>
+                  <a:lnTo>
+                    <a:pt x="2148675" y="1559521"/>
+                  </a:lnTo>
+                  <a:lnTo>
+                    <a:pt x="2220298" y="1672818"/>
+                  </a:lnTo>
+                  <a:lnTo>
+                    <a:pt x="2291920" y="1779443"/>
+                  </a:lnTo>
+                  <a:lnTo>
+                    <a:pt x="2363543" y="1879791"/>
+                  </a:lnTo>
+                  <a:lnTo>
+                    <a:pt x="2435165" y="1974230"/>
+                  </a:lnTo>
+                  <a:lnTo>
+                    <a:pt x="2506788" y="2063109"/>
+                  </a:lnTo>
+                  <a:lnTo>
+                    <a:pt x="2578410" y="2146755"/>
+                  </a:lnTo>
+                  <a:lnTo>
+                    <a:pt x="2650033" y="2225476"/>
+                  </a:lnTo>
+                  <a:lnTo>
+                    <a:pt x="2721655" y="2299562"/>
+                  </a:lnTo>
+                  <a:lnTo>
+                    <a:pt x="2793278" y="2369285"/>
+                  </a:lnTo>
+                  <a:lnTo>
+                    <a:pt x="2864901" y="2434904"/>
+                  </a:lnTo>
+                  <a:lnTo>
+                    <a:pt x="2936523" y="2496658"/>
+                  </a:lnTo>
+                  <a:lnTo>
+                    <a:pt x="3008146" y="2554777"/>
+                  </a:lnTo>
+                  <a:lnTo>
+                    <a:pt x="3079768" y="2609474"/>
+                  </a:lnTo>
+                  <a:lnTo>
+                    <a:pt x="3151391" y="2656130"/>
+                  </a:lnTo>
+                  <a:lnTo>
+                    <a:pt x="3223013" y="2669891"/>
+                  </a:lnTo>
+                  <a:lnTo>
+                    <a:pt x="3294636" y="2683423"/>
+                  </a:lnTo>
+                  <a:lnTo>
+                    <a:pt x="3366258" y="2696730"/>
+                  </a:lnTo>
+                  <a:lnTo>
+                    <a:pt x="3437881" y="2709816"/>
+                  </a:lnTo>
+                  <a:lnTo>
+                    <a:pt x="3509503" y="2722684"/>
+                  </a:lnTo>
+                  <a:lnTo>
+                    <a:pt x="3581126" y="2735338"/>
+                  </a:lnTo>
+                  <a:lnTo>
+                    <a:pt x="3652748" y="2747782"/>
+                  </a:lnTo>
+                  <a:lnTo>
+                    <a:pt x="3724371" y="2760019"/>
+                  </a:lnTo>
+                  <a:lnTo>
+                    <a:pt x="3795993" y="2772052"/>
+                  </a:lnTo>
+                  <a:lnTo>
+                    <a:pt x="3867616" y="2783886"/>
+                  </a:lnTo>
+                  <a:lnTo>
+                    <a:pt x="3939238" y="2795522"/>
+                  </a:lnTo>
+                  <a:lnTo>
+                    <a:pt x="4010861" y="2806965"/>
+                  </a:lnTo>
+                  <a:lnTo>
+                    <a:pt x="4082483" y="2818218"/>
+                  </a:lnTo>
+                  <a:lnTo>
+                    <a:pt x="4154106" y="2829284"/>
+                  </a:lnTo>
+                  <a:lnTo>
+                    <a:pt x="4225729" y="2840166"/>
+                  </a:lnTo>
+                  <a:lnTo>
+                    <a:pt x="4297351" y="2850866"/>
+                  </a:lnTo>
+                  <a:lnTo>
+                    <a:pt x="4368974" y="2861389"/>
+                  </a:lnTo>
+                  <a:lnTo>
+                    <a:pt x="4440596" y="2871737"/>
+                  </a:lnTo>
+                  <a:lnTo>
+                    <a:pt x="4512219" y="2881913"/>
+                  </a:lnTo>
+                  <a:lnTo>
+                    <a:pt x="4583841" y="2891920"/>
+                  </a:lnTo>
+                  <a:lnTo>
+                    <a:pt x="4655464" y="2901760"/>
+                  </a:lnTo>
+                  <a:lnTo>
+                    <a:pt x="4727086" y="2911437"/>
+                  </a:lnTo>
+                  <a:lnTo>
+                    <a:pt x="4798709" y="2920952"/>
+                  </a:lnTo>
+                  <a:lnTo>
+                    <a:pt x="4870331" y="2930310"/>
+                  </a:lnTo>
+                  <a:lnTo>
+                    <a:pt x="4941954" y="2939512"/>
+                  </a:lnTo>
+                  <a:lnTo>
+                    <a:pt x="5013576" y="2948561"/>
+                  </a:lnTo>
+                  <a:lnTo>
+                    <a:pt x="5085199" y="2957460"/>
+                  </a:lnTo>
+                  <a:lnTo>
+                    <a:pt x="5156821" y="2966210"/>
+                  </a:lnTo>
+                  <a:lnTo>
+                    <a:pt x="5228444" y="2974815"/>
+                  </a:lnTo>
+                  <a:lnTo>
+                    <a:pt x="5300066" y="2983277"/>
+                  </a:lnTo>
+                  <a:lnTo>
+                    <a:pt x="5371689" y="2991598"/>
+                  </a:lnTo>
+                  <a:lnTo>
+                    <a:pt x="5443311" y="2999781"/>
+                  </a:lnTo>
+                  <a:lnTo>
+                    <a:pt x="5514934" y="3007828"/>
+                  </a:lnTo>
+                  <a:lnTo>
+                    <a:pt x="5586557" y="3015741"/>
+                  </a:lnTo>
+                  <a:lnTo>
+                    <a:pt x="5658179" y="3023523"/>
+                  </a:lnTo>
+                  <a:lnTo>
+                    <a:pt x="5729802" y="3031175"/>
+                  </a:lnTo>
+                  <a:lnTo>
+                    <a:pt x="5801424" y="3038700"/>
+                  </a:lnTo>
+                  <a:lnTo>
+                    <a:pt x="5873047" y="3046100"/>
+                  </a:lnTo>
+                  <a:lnTo>
+                    <a:pt x="5944669" y="3053376"/>
+                  </a:lnTo>
+                  <a:lnTo>
+                    <a:pt x="6016292" y="3060532"/>
+                  </a:lnTo>
+                  <a:lnTo>
+                    <a:pt x="6087914" y="3067569"/>
+                  </a:lnTo>
+                  <a:lnTo>
+                    <a:pt x="6159537" y="3074489"/>
+                  </a:lnTo>
+                  <a:lnTo>
+                    <a:pt x="6231159" y="3081293"/>
+                  </a:lnTo>
+                  <a:lnTo>
+                    <a:pt x="6302782" y="3087985"/>
+                  </a:lnTo>
+                  <a:lnTo>
+                    <a:pt x="6374404" y="3094565"/>
+                  </a:lnTo>
+                  <a:lnTo>
+                    <a:pt x="6446027" y="3101036"/>
+                  </a:lnTo>
+                  <a:lnTo>
+                    <a:pt x="6517649" y="3107400"/>
+                  </a:lnTo>
+                  <a:lnTo>
+                    <a:pt x="6589272" y="3113657"/>
+                  </a:lnTo>
+                  <a:lnTo>
+                    <a:pt x="6660894" y="3119811"/>
+                  </a:lnTo>
+                  <a:lnTo>
+                    <a:pt x="6732517" y="3125862"/>
+                  </a:lnTo>
+                  <a:lnTo>
+                    <a:pt x="6804139" y="3131812"/>
+                  </a:lnTo>
+                  <a:lnTo>
+                    <a:pt x="6875762" y="3137664"/>
+                  </a:lnTo>
+                  <a:lnTo>
+                    <a:pt x="6947385" y="3143418"/>
+                  </a:lnTo>
+                  <a:lnTo>
+                    <a:pt x="7019007" y="3149077"/>
+                  </a:lnTo>
+                  <a:lnTo>
+                    <a:pt x="7090630" y="3154641"/>
+                  </a:lnTo>
+                  <a:lnTo>
+                    <a:pt x="7090630" y="3454519"/>
+                  </a:lnTo>
+                  <a:lnTo>
+                    <a:pt x="7019007" y="3452690"/>
+                  </a:lnTo>
+                  <a:lnTo>
+                    <a:pt x="6947385" y="3450747"/>
+                  </a:lnTo>
+                  <a:lnTo>
+                    <a:pt x="6875762" y="3448683"/>
+                  </a:lnTo>
+                  <a:lnTo>
+                    <a:pt x="6804139" y="3446489"/>
+                  </a:lnTo>
+                  <a:lnTo>
+                    <a:pt x="6732517" y="3444158"/>
+                  </a:lnTo>
+                  <a:lnTo>
+                    <a:pt x="6660894" y="3441682"/>
+                  </a:lnTo>
+                  <a:lnTo>
+                    <a:pt x="6589272" y="3439050"/>
+                  </a:lnTo>
+                  <a:lnTo>
+                    <a:pt x="6517649" y="3436254"/>
+                  </a:lnTo>
+                  <a:lnTo>
+                    <a:pt x="6446027" y="3433282"/>
+                  </a:lnTo>
+                  <a:lnTo>
+                    <a:pt x="6374404" y="3430125"/>
+                  </a:lnTo>
+                  <a:lnTo>
+                    <a:pt x="6302782" y="3426770"/>
+                  </a:lnTo>
+                  <a:lnTo>
+                    <a:pt x="6231159" y="3423206"/>
+                  </a:lnTo>
+                  <a:lnTo>
+                    <a:pt x="6159537" y="3419418"/>
+                  </a:lnTo>
+                  <a:lnTo>
+                    <a:pt x="6087914" y="3415394"/>
+                  </a:lnTo>
+                  <a:lnTo>
+                    <a:pt x="6016292" y="3411117"/>
+                  </a:lnTo>
+                  <a:lnTo>
+                    <a:pt x="5944669" y="3406574"/>
+                  </a:lnTo>
+                  <a:lnTo>
+                    <a:pt x="5873047" y="3401745"/>
+                  </a:lnTo>
+                  <a:lnTo>
+                    <a:pt x="5801424" y="3396615"/>
+                  </a:lnTo>
+                  <a:lnTo>
+                    <a:pt x="5729802" y="3391164"/>
+                  </a:lnTo>
+                  <a:lnTo>
+                    <a:pt x="5658179" y="3385372"/>
+                  </a:lnTo>
+                  <a:lnTo>
+                    <a:pt x="5586557" y="3379217"/>
+                  </a:lnTo>
+                  <a:lnTo>
+                    <a:pt x="5514934" y="3372678"/>
+                  </a:lnTo>
+                  <a:lnTo>
+                    <a:pt x="5443311" y="3365729"/>
+                  </a:lnTo>
+                  <a:lnTo>
+                    <a:pt x="5371689" y="3358345"/>
+                  </a:lnTo>
+                  <a:lnTo>
+                    <a:pt x="5300066" y="3350500"/>
+                  </a:lnTo>
+                  <a:lnTo>
+                    <a:pt x="5228444" y="3342164"/>
+                  </a:lnTo>
+                  <a:lnTo>
+                    <a:pt x="5156821" y="3333306"/>
+                  </a:lnTo>
+                  <a:lnTo>
+                    <a:pt x="5085199" y="3323894"/>
+                  </a:lnTo>
+                  <a:lnTo>
+                    <a:pt x="5013576" y="3313893"/>
+                  </a:lnTo>
+                  <a:lnTo>
+                    <a:pt x="4941954" y="3303267"/>
+                  </a:lnTo>
+                  <a:lnTo>
+                    <a:pt x="4870331" y="3291975"/>
+                  </a:lnTo>
+                  <a:lnTo>
+                    <a:pt x="4798709" y="3279978"/>
+                  </a:lnTo>
+                  <a:lnTo>
+                    <a:pt x="4727086" y="3267229"/>
+                  </a:lnTo>
+                  <a:lnTo>
+                    <a:pt x="4655464" y="3253684"/>
+                  </a:lnTo>
+                  <a:lnTo>
+                    <a:pt x="4583841" y="3239290"/>
+                  </a:lnTo>
+                  <a:lnTo>
+                    <a:pt x="4512219" y="3223996"/>
+                  </a:lnTo>
+                  <a:lnTo>
+                    <a:pt x="4440596" y="3207746"/>
+                  </a:lnTo>
+                  <a:lnTo>
+                    <a:pt x="4368974" y="3190478"/>
+                  </a:lnTo>
+                  <a:lnTo>
+                    <a:pt x="4297351" y="3172131"/>
+                  </a:lnTo>
+                  <a:lnTo>
+                    <a:pt x="4225729" y="3152635"/>
+                  </a:lnTo>
+                  <a:lnTo>
+                    <a:pt x="4154106" y="3131920"/>
+                  </a:lnTo>
+                  <a:lnTo>
+                    <a:pt x="4082483" y="3109909"/>
+                  </a:lnTo>
+                  <a:lnTo>
+                    <a:pt x="4010861" y="3086521"/>
+                  </a:lnTo>
+                  <a:lnTo>
+                    <a:pt x="3939238" y="3061669"/>
+                  </a:lnTo>
+                  <a:lnTo>
+                    <a:pt x="3867616" y="3035263"/>
+                  </a:lnTo>
+                  <a:lnTo>
+                    <a:pt x="3795993" y="3007204"/>
+                  </a:lnTo>
+                  <a:lnTo>
+                    <a:pt x="3724371" y="2977391"/>
+                  </a:lnTo>
+                  <a:lnTo>
+                    <a:pt x="3652748" y="2945712"/>
+                  </a:lnTo>
+                  <a:lnTo>
+                    <a:pt x="3581126" y="2912051"/>
+                  </a:lnTo>
+                  <a:lnTo>
+                    <a:pt x="3509503" y="2876284"/>
+                  </a:lnTo>
+                  <a:lnTo>
+                    <a:pt x="3437881" y="2838280"/>
+                  </a:lnTo>
+                  <a:lnTo>
+                    <a:pt x="3366258" y="2797897"/>
+                  </a:lnTo>
+                  <a:lnTo>
+                    <a:pt x="3294636" y="2754989"/>
+                  </a:lnTo>
+                  <a:lnTo>
+                    <a:pt x="3223013" y="2709396"/>
+                  </a:lnTo>
+                  <a:lnTo>
+                    <a:pt x="3151391" y="2660950"/>
+                  </a:lnTo>
+                  <a:lnTo>
+                    <a:pt x="3079768" y="2642137"/>
+                  </a:lnTo>
+                  <a:lnTo>
+                    <a:pt x="3008146" y="2627907"/>
+                  </a:lnTo>
+                  <a:lnTo>
+                    <a:pt x="2936523" y="2613436"/>
+                  </a:lnTo>
+                  <a:lnTo>
+                    <a:pt x="2864901" y="2598721"/>
+                  </a:lnTo>
+                  <a:lnTo>
+                    <a:pt x="2793278" y="2583757"/>
+                  </a:lnTo>
+                  <a:lnTo>
+                    <a:pt x="2721655" y="2568540"/>
+                  </a:lnTo>
+                  <a:lnTo>
+                    <a:pt x="2650033" y="2553065"/>
+                  </a:lnTo>
+                  <a:lnTo>
+                    <a:pt x="2578410" y="2537329"/>
+                  </a:lnTo>
+                  <a:lnTo>
+                    <a:pt x="2506788" y="2521327"/>
+                  </a:lnTo>
+                  <a:lnTo>
+                    <a:pt x="2435165" y="2505055"/>
+                  </a:lnTo>
+                  <a:lnTo>
+                    <a:pt x="2363543" y="2488507"/>
+                  </a:lnTo>
+                  <a:lnTo>
+                    <a:pt x="2291920" y="2471679"/>
+                  </a:lnTo>
+                  <a:lnTo>
+                    <a:pt x="2220298" y="2454567"/>
+                  </a:lnTo>
+                  <a:lnTo>
+                    <a:pt x="2148675" y="2437165"/>
+                  </a:lnTo>
+                  <a:lnTo>
+                    <a:pt x="2077053" y="2419470"/>
+                  </a:lnTo>
+                  <a:lnTo>
+                    <a:pt x="2005430" y="2401475"/>
+                  </a:lnTo>
+                  <a:lnTo>
+                    <a:pt x="1933808" y="2383176"/>
+                  </a:lnTo>
+                  <a:lnTo>
+                    <a:pt x="1862185" y="2364567"/>
+                  </a:lnTo>
+                  <a:lnTo>
+                    <a:pt x="1790563" y="2345644"/>
+                  </a:lnTo>
+                  <a:lnTo>
+                    <a:pt x="1718940" y="2326401"/>
+                  </a:lnTo>
+                  <a:lnTo>
+                    <a:pt x="1647318" y="2306832"/>
+                  </a:lnTo>
+                  <a:lnTo>
+                    <a:pt x="1575695" y="2286933"/>
+                  </a:lnTo>
+                  <a:lnTo>
+                    <a:pt x="1504073" y="2266697"/>
+                  </a:lnTo>
+                  <a:lnTo>
+                    <a:pt x="1432450" y="2246119"/>
+                  </a:lnTo>
+                  <a:lnTo>
+                    <a:pt x="1360827" y="2225193"/>
+                  </a:lnTo>
+                  <a:lnTo>
+                    <a:pt x="1289205" y="2203913"/>
+                  </a:lnTo>
+                  <a:lnTo>
+                    <a:pt x="1217582" y="2182273"/>
+                  </a:lnTo>
+                  <a:lnTo>
+                    <a:pt x="1145960" y="2160268"/>
+                  </a:lnTo>
+                  <a:lnTo>
+                    <a:pt x="1074337" y="2137890"/>
+                  </a:lnTo>
+                  <a:lnTo>
+                    <a:pt x="1002715" y="2115135"/>
+                  </a:lnTo>
+                  <a:lnTo>
+                    <a:pt x="931092" y="2091994"/>
+                  </a:lnTo>
+                  <a:lnTo>
+                    <a:pt x="859470" y="2068462"/>
+                  </a:lnTo>
+                  <a:lnTo>
+                    <a:pt x="787847" y="2044532"/>
+                  </a:lnTo>
+                  <a:lnTo>
+                    <a:pt x="716225" y="2020198"/>
+                  </a:lnTo>
+                  <a:lnTo>
+                    <a:pt x="644602" y="1995452"/>
+                  </a:lnTo>
+                  <a:lnTo>
+                    <a:pt x="572980" y="1970288"/>
+                  </a:lnTo>
+                  <a:lnTo>
+                    <a:pt x="501357" y="1944698"/>
+                  </a:lnTo>
+                  <a:lnTo>
+                    <a:pt x="429735" y="1918676"/>
+                  </a:lnTo>
+                  <a:lnTo>
+                    <a:pt x="358112" y="1892213"/>
+                  </a:lnTo>
+                  <a:lnTo>
+                    <a:pt x="286490" y="1865303"/>
+                  </a:lnTo>
+                  <a:lnTo>
+                    <a:pt x="214867" y="1837938"/>
+                  </a:lnTo>
+                  <a:lnTo>
+                    <a:pt x="143245" y="1810111"/>
+                  </a:lnTo>
+                  <a:lnTo>
+                    <a:pt x="71622" y="1781813"/>
+                  </a:lnTo>
+                  <a:lnTo>
+                    <a:pt x="0" y="1753036"/>
                   </a:lnTo>
                   <a:close/>
                 </a:path>
@@ -3963,255 +3960,252 @@
           </p:nvSpPr>
           <p:spPr>
             <a:xfrm>
-              <a:off x="2590414" y="2073503"/>
-              <a:ext cx="5672264" cy="3129921"/>
+              <a:off x="2620512" y="2073503"/>
+              <a:ext cx="5642166" cy="3154641"/>
             </a:xfrm>
             <a:custGeom>
               <a:avLst/>
               <a:pathLst>
-                <a:path w="5672264" h="3129921">
+                <a:path w="5642166" h="3154641">
                   <a:moveTo>
                     <a:pt x="0" y="0"/>
                   </a:moveTo>
                   <a:lnTo>
-                    <a:pt x="14085" y="41595"/>
-                  </a:lnTo>
-                  <a:lnTo>
-                    <a:pt x="85707" y="240864"/>
-                  </a:lnTo>
-                  <a:lnTo>
-                    <a:pt x="157330" y="428596"/>
-                  </a:lnTo>
-                  <a:lnTo>
-                    <a:pt x="228952" y="605461"/>
-                  </a:lnTo>
-                  <a:lnTo>
-                    <a:pt x="300575" y="772087"/>
-                  </a:lnTo>
-                  <a:lnTo>
-                    <a:pt x="372197" y="929067"/>
-                  </a:lnTo>
-                  <a:lnTo>
-                    <a:pt x="443820" y="1076959"/>
-                  </a:lnTo>
-                  <a:lnTo>
-                    <a:pt x="515442" y="1216289"/>
-                  </a:lnTo>
-                  <a:lnTo>
-                    <a:pt x="587065" y="1347554"/>
-                  </a:lnTo>
-                  <a:lnTo>
-                    <a:pt x="658687" y="1471219"/>
-                  </a:lnTo>
-                  <a:lnTo>
-                    <a:pt x="730310" y="1587726"/>
-                  </a:lnTo>
-                  <a:lnTo>
-                    <a:pt x="801932" y="1697488"/>
-                  </a:lnTo>
-                  <a:lnTo>
-                    <a:pt x="873555" y="1800895"/>
-                  </a:lnTo>
-                  <a:lnTo>
-                    <a:pt x="945177" y="1898317"/>
-                  </a:lnTo>
-                  <a:lnTo>
-                    <a:pt x="1016800" y="1990098"/>
-                  </a:lnTo>
-                  <a:lnTo>
-                    <a:pt x="1088423" y="2076567"/>
-                  </a:lnTo>
-                  <a:lnTo>
-                    <a:pt x="1160045" y="2158029"/>
-                  </a:lnTo>
-                  <a:lnTo>
-                    <a:pt x="1231668" y="2234776"/>
-                  </a:lnTo>
-                  <a:lnTo>
-                    <a:pt x="1303290" y="2307080"/>
-                  </a:lnTo>
-                  <a:lnTo>
-                    <a:pt x="1374913" y="2375198"/>
-                  </a:lnTo>
-                  <a:lnTo>
-                    <a:pt x="1446535" y="2439372"/>
-                  </a:lnTo>
-                  <a:lnTo>
-                    <a:pt x="1518158" y="2499832"/>
-                  </a:lnTo>
-                  <a:lnTo>
-                    <a:pt x="1589780" y="2556791"/>
-                  </a:lnTo>
-                  <a:lnTo>
-                    <a:pt x="1661403" y="2610453"/>
-                  </a:lnTo>
-                  <a:lnTo>
-                    <a:pt x="1733025" y="2656031"/>
-                  </a:lnTo>
-                  <a:lnTo>
-                    <a:pt x="1804648" y="2668723"/>
-                  </a:lnTo>
-                  <a:lnTo>
-                    <a:pt x="1876270" y="2681220"/>
-                  </a:lnTo>
-                  <a:lnTo>
-                    <a:pt x="1947893" y="2693525"/>
-                  </a:lnTo>
-                  <a:lnTo>
-                    <a:pt x="2019515" y="2705642"/>
-                  </a:lnTo>
-                  <a:lnTo>
-                    <a:pt x="2091138" y="2717573"/>
-                  </a:lnTo>
-                  <a:lnTo>
-                    <a:pt x="2162760" y="2729321"/>
-                  </a:lnTo>
-                  <a:lnTo>
-                    <a:pt x="2234383" y="2740888"/>
-                  </a:lnTo>
-                  <a:lnTo>
-                    <a:pt x="2306005" y="2752279"/>
-                  </a:lnTo>
-                  <a:lnTo>
-                    <a:pt x="2377628" y="2763495"/>
-                  </a:lnTo>
-                  <a:lnTo>
-                    <a:pt x="2449251" y="2774539"/>
-                  </a:lnTo>
-                  <a:lnTo>
-                    <a:pt x="2520873" y="2785413"/>
-                  </a:lnTo>
-                  <a:lnTo>
-                    <a:pt x="2592496" y="2796121"/>
-                  </a:lnTo>
-                  <a:lnTo>
-                    <a:pt x="2664118" y="2806664"/>
-                  </a:lnTo>
-                  <a:lnTo>
-                    <a:pt x="2735741" y="2817046"/>
-                  </a:lnTo>
-                  <a:lnTo>
-                    <a:pt x="2807363" y="2827269"/>
-                  </a:lnTo>
-                  <a:lnTo>
-                    <a:pt x="2878986" y="2837335"/>
-                  </a:lnTo>
-                  <a:lnTo>
-                    <a:pt x="2950608" y="2847247"/>
-                  </a:lnTo>
-                  <a:lnTo>
-                    <a:pt x="3022231" y="2857006"/>
-                  </a:lnTo>
-                  <a:lnTo>
-                    <a:pt x="3093853" y="2866616"/>
-                  </a:lnTo>
-                  <a:lnTo>
-                    <a:pt x="3165476" y="2876079"/>
-                  </a:lnTo>
-                  <a:lnTo>
-                    <a:pt x="3237098" y="2885397"/>
-                  </a:lnTo>
-                  <a:lnTo>
-                    <a:pt x="3308721" y="2894571"/>
-                  </a:lnTo>
-                  <a:lnTo>
-                    <a:pt x="3380343" y="2903605"/>
-                  </a:lnTo>
-                  <a:lnTo>
-                    <a:pt x="3451966" y="2912501"/>
-                  </a:lnTo>
-                  <a:lnTo>
-                    <a:pt x="3523588" y="2921260"/>
-                  </a:lnTo>
-                  <a:lnTo>
-                    <a:pt x="3595211" y="2929885"/>
-                  </a:lnTo>
-                  <a:lnTo>
-                    <a:pt x="3666833" y="2938377"/>
-                  </a:lnTo>
-                  <a:lnTo>
-                    <a:pt x="3738456" y="2946740"/>
-                  </a:lnTo>
-                  <a:lnTo>
-                    <a:pt x="3810079" y="2954974"/>
-                  </a:lnTo>
-                  <a:lnTo>
-                    <a:pt x="3881701" y="2963081"/>
-                  </a:lnTo>
-                  <a:lnTo>
-                    <a:pt x="3953324" y="2971065"/>
-                  </a:lnTo>
-                  <a:lnTo>
-                    <a:pt x="4024946" y="2978926"/>
-                  </a:lnTo>
-                  <a:lnTo>
-                    <a:pt x="4096569" y="2986667"/>
-                  </a:lnTo>
-                  <a:lnTo>
-                    <a:pt x="4168191" y="2994289"/>
-                  </a:lnTo>
-                  <a:lnTo>
-                    <a:pt x="4239814" y="3001794"/>
-                  </a:lnTo>
-                  <a:lnTo>
-                    <a:pt x="4311436" y="3009183"/>
-                  </a:lnTo>
-                  <a:lnTo>
-                    <a:pt x="4383059" y="3016460"/>
-                  </a:lnTo>
-                  <a:lnTo>
-                    <a:pt x="4454681" y="3023625"/>
-                  </a:lnTo>
-                  <a:lnTo>
-                    <a:pt x="4526304" y="3030680"/>
-                  </a:lnTo>
-                  <a:lnTo>
-                    <a:pt x="4597926" y="3037627"/>
-                  </a:lnTo>
-                  <a:lnTo>
-                    <a:pt x="4669549" y="3044468"/>
-                  </a:lnTo>
-                  <a:lnTo>
-                    <a:pt x="4741171" y="3051203"/>
-                  </a:lnTo>
-                  <a:lnTo>
-                    <a:pt x="4812794" y="3057836"/>
-                  </a:lnTo>
-                  <a:lnTo>
-                    <a:pt x="4884416" y="3064366"/>
-                  </a:lnTo>
-                  <a:lnTo>
-                    <a:pt x="4956039" y="3070797"/>
-                  </a:lnTo>
-                  <a:lnTo>
-                    <a:pt x="5027661" y="3077129"/>
-                  </a:lnTo>
-                  <a:lnTo>
-                    <a:pt x="5099284" y="3083364"/>
-                  </a:lnTo>
-                  <a:lnTo>
-                    <a:pt x="5170907" y="3089503"/>
-                  </a:lnTo>
-                  <a:lnTo>
-                    <a:pt x="5242529" y="3095548"/>
-                  </a:lnTo>
-                  <a:lnTo>
-                    <a:pt x="5314152" y="3101500"/>
-                  </a:lnTo>
-                  <a:lnTo>
-                    <a:pt x="5385774" y="3107361"/>
-                  </a:lnTo>
-                  <a:lnTo>
-                    <a:pt x="5457397" y="3113133"/>
-                  </a:lnTo>
-                  <a:lnTo>
-                    <a:pt x="5529019" y="3118815"/>
-                  </a:lnTo>
-                  <a:lnTo>
-                    <a:pt x="5600642" y="3124411"/>
-                  </a:lnTo>
-                  <a:lnTo>
-                    <a:pt x="5672264" y="3129921"/>
+                    <a:pt x="55609" y="161385"/>
+                  </a:lnTo>
+                  <a:lnTo>
+                    <a:pt x="127232" y="357002"/>
+                  </a:lnTo>
+                  <a:lnTo>
+                    <a:pt x="198854" y="541102"/>
+                  </a:lnTo>
+                  <a:lnTo>
+                    <a:pt x="270477" y="714362"/>
+                  </a:lnTo>
+                  <a:lnTo>
+                    <a:pt x="342099" y="877421"/>
+                  </a:lnTo>
+                  <a:lnTo>
+                    <a:pt x="413722" y="1030879"/>
+                  </a:lnTo>
+                  <a:lnTo>
+                    <a:pt x="485345" y="1175301"/>
+                  </a:lnTo>
+                  <a:lnTo>
+                    <a:pt x="556967" y="1311220"/>
+                  </a:lnTo>
+                  <a:lnTo>
+                    <a:pt x="628590" y="1439136"/>
+                  </a:lnTo>
+                  <a:lnTo>
+                    <a:pt x="700212" y="1559521"/>
+                  </a:lnTo>
+                  <a:lnTo>
+                    <a:pt x="771835" y="1672818"/>
+                  </a:lnTo>
+                  <a:lnTo>
+                    <a:pt x="843457" y="1779443"/>
+                  </a:lnTo>
+                  <a:lnTo>
+                    <a:pt x="915080" y="1879791"/>
+                  </a:lnTo>
+                  <a:lnTo>
+                    <a:pt x="986702" y="1974230"/>
+                  </a:lnTo>
+                  <a:lnTo>
+                    <a:pt x="1058325" y="2063109"/>
+                  </a:lnTo>
+                  <a:lnTo>
+                    <a:pt x="1129947" y="2146755"/>
+                  </a:lnTo>
+                  <a:lnTo>
+                    <a:pt x="1201570" y="2225476"/>
+                  </a:lnTo>
+                  <a:lnTo>
+                    <a:pt x="1273192" y="2299562"/>
+                  </a:lnTo>
+                  <a:lnTo>
+                    <a:pt x="1344815" y="2369285"/>
+                  </a:lnTo>
+                  <a:lnTo>
+                    <a:pt x="1416437" y="2434904"/>
+                  </a:lnTo>
+                  <a:lnTo>
+                    <a:pt x="1488060" y="2496658"/>
+                  </a:lnTo>
+                  <a:lnTo>
+                    <a:pt x="1559682" y="2554777"/>
+                  </a:lnTo>
+                  <a:lnTo>
+                    <a:pt x="1631305" y="2609474"/>
+                  </a:lnTo>
+                  <a:lnTo>
+                    <a:pt x="1702927" y="2656130"/>
+                  </a:lnTo>
+                  <a:lnTo>
+                    <a:pt x="1774550" y="2669891"/>
+                  </a:lnTo>
+                  <a:lnTo>
+                    <a:pt x="1846173" y="2683423"/>
+                  </a:lnTo>
+                  <a:lnTo>
+                    <a:pt x="1917795" y="2696730"/>
+                  </a:lnTo>
+                  <a:lnTo>
+                    <a:pt x="1989418" y="2709816"/>
+                  </a:lnTo>
+                  <a:lnTo>
+                    <a:pt x="2061040" y="2722684"/>
+                  </a:lnTo>
+                  <a:lnTo>
+                    <a:pt x="2132663" y="2735338"/>
+                  </a:lnTo>
+                  <a:lnTo>
+                    <a:pt x="2204285" y="2747782"/>
+                  </a:lnTo>
+                  <a:lnTo>
+                    <a:pt x="2275908" y="2760019"/>
+                  </a:lnTo>
+                  <a:lnTo>
+                    <a:pt x="2347530" y="2772052"/>
+                  </a:lnTo>
+                  <a:lnTo>
+                    <a:pt x="2419153" y="2783886"/>
+                  </a:lnTo>
+                  <a:lnTo>
+                    <a:pt x="2490775" y="2795522"/>
+                  </a:lnTo>
+                  <a:lnTo>
+                    <a:pt x="2562398" y="2806965"/>
+                  </a:lnTo>
+                  <a:lnTo>
+                    <a:pt x="2634020" y="2818218"/>
+                  </a:lnTo>
+                  <a:lnTo>
+                    <a:pt x="2705643" y="2829284"/>
+                  </a:lnTo>
+                  <a:lnTo>
+                    <a:pt x="2777265" y="2840166"/>
+                  </a:lnTo>
+                  <a:lnTo>
+                    <a:pt x="2848888" y="2850866"/>
+                  </a:lnTo>
+                  <a:lnTo>
+                    <a:pt x="2920510" y="2861389"/>
+                  </a:lnTo>
+                  <a:lnTo>
+                    <a:pt x="2992133" y="2871737"/>
+                  </a:lnTo>
+                  <a:lnTo>
+                    <a:pt x="3063755" y="2881913"/>
+                  </a:lnTo>
+                  <a:lnTo>
+                    <a:pt x="3135378" y="2891920"/>
+                  </a:lnTo>
+                  <a:lnTo>
+                    <a:pt x="3207001" y="2901760"/>
+                  </a:lnTo>
+                  <a:lnTo>
+                    <a:pt x="3278623" y="2911437"/>
+                  </a:lnTo>
+                  <a:lnTo>
+                    <a:pt x="3350246" y="2920952"/>
+                  </a:lnTo>
+                  <a:lnTo>
+                    <a:pt x="3421868" y="2930310"/>
+                  </a:lnTo>
+                  <a:lnTo>
+                    <a:pt x="3493491" y="2939512"/>
+                  </a:lnTo>
+                  <a:lnTo>
+                    <a:pt x="3565113" y="2948561"/>
+                  </a:lnTo>
+                  <a:lnTo>
+                    <a:pt x="3636736" y="2957460"/>
+                  </a:lnTo>
+                  <a:lnTo>
+                    <a:pt x="3708358" y="2966210"/>
+                  </a:lnTo>
+                  <a:lnTo>
+                    <a:pt x="3779981" y="2974815"/>
+                  </a:lnTo>
+                  <a:lnTo>
+                    <a:pt x="3851603" y="2983277"/>
+                  </a:lnTo>
+                  <a:lnTo>
+                    <a:pt x="3923226" y="2991598"/>
+                  </a:lnTo>
+                  <a:lnTo>
+                    <a:pt x="3994848" y="2999781"/>
+                  </a:lnTo>
+                  <a:lnTo>
+                    <a:pt x="4066471" y="3007828"/>
+                  </a:lnTo>
+                  <a:lnTo>
+                    <a:pt x="4138093" y="3015741"/>
+                  </a:lnTo>
+                  <a:lnTo>
+                    <a:pt x="4209716" y="3023523"/>
+                  </a:lnTo>
+                  <a:lnTo>
+                    <a:pt x="4281338" y="3031175"/>
+                  </a:lnTo>
+                  <a:lnTo>
+                    <a:pt x="4352961" y="3038700"/>
+                  </a:lnTo>
+                  <a:lnTo>
+                    <a:pt x="4424583" y="3046100"/>
+                  </a:lnTo>
+                  <a:lnTo>
+                    <a:pt x="4496206" y="3053376"/>
+                  </a:lnTo>
+                  <a:lnTo>
+                    <a:pt x="4567829" y="3060532"/>
+                  </a:lnTo>
+                  <a:lnTo>
+                    <a:pt x="4639451" y="3067569"/>
+                  </a:lnTo>
+                  <a:lnTo>
+                    <a:pt x="4711074" y="3074489"/>
+                  </a:lnTo>
+                  <a:lnTo>
+                    <a:pt x="4782696" y="3081293"/>
+                  </a:lnTo>
+                  <a:lnTo>
+                    <a:pt x="4854319" y="3087985"/>
+                  </a:lnTo>
+                  <a:lnTo>
+                    <a:pt x="4925941" y="3094565"/>
+                  </a:lnTo>
+                  <a:lnTo>
+                    <a:pt x="4997564" y="3101036"/>
+                  </a:lnTo>
+                  <a:lnTo>
+                    <a:pt x="5069186" y="3107400"/>
+                  </a:lnTo>
+                  <a:lnTo>
+                    <a:pt x="5140809" y="3113657"/>
+                  </a:lnTo>
+                  <a:lnTo>
+                    <a:pt x="5212431" y="3119811"/>
+                  </a:lnTo>
+                  <a:lnTo>
+                    <a:pt x="5284054" y="3125862"/>
+                  </a:lnTo>
+                  <a:lnTo>
+                    <a:pt x="5355676" y="3131812"/>
+                  </a:lnTo>
+                  <a:lnTo>
+                    <a:pt x="5427299" y="3137664"/>
+                  </a:lnTo>
+                  <a:lnTo>
+                    <a:pt x="5498921" y="3143418"/>
+                  </a:lnTo>
+                  <a:lnTo>
+                    <a:pt x="5570544" y="3149077"/>
+                  </a:lnTo>
+                  <a:lnTo>
+                    <a:pt x="5642166" y="3154641"/>
                   </a:lnTo>
                 </a:path>
               </a:pathLst>
@@ -4231,309 +4225,309 @@
           </p:nvSpPr>
           <p:spPr>
             <a:xfrm>
-              <a:off x="1172049" y="3923617"/>
-              <a:ext cx="7090630" cy="1602670"/>
+              <a:off x="1172049" y="3826539"/>
+              <a:ext cx="7090630" cy="1701482"/>
             </a:xfrm>
             <a:custGeom>
               <a:avLst/>
               <a:pathLst>
-                <a:path w="7090630" h="1602670">
+                <a:path w="7090630" h="1701482">
                   <a:moveTo>
-                    <a:pt x="7090630" y="1602670"/>
+                    <a:pt x="7090630" y="1701482"/>
                   </a:moveTo>
                   <a:lnTo>
-                    <a:pt x="7019007" y="1600767"/>
-                  </a:lnTo>
-                  <a:lnTo>
-                    <a:pt x="6947385" y="1598748"/>
-                  </a:lnTo>
-                  <a:lnTo>
-                    <a:pt x="6875762" y="1596604"/>
-                  </a:lnTo>
-                  <a:lnTo>
-                    <a:pt x="6804139" y="1594329"/>
-                  </a:lnTo>
-                  <a:lnTo>
-                    <a:pt x="6732517" y="1591914"/>
-                  </a:lnTo>
-                  <a:lnTo>
-                    <a:pt x="6660894" y="1589350"/>
-                  </a:lnTo>
-                  <a:lnTo>
-                    <a:pt x="6589272" y="1586629"/>
-                  </a:lnTo>
-                  <a:lnTo>
-                    <a:pt x="6517649" y="1583741"/>
-                  </a:lnTo>
-                  <a:lnTo>
-                    <a:pt x="6446027" y="1580675"/>
-                  </a:lnTo>
-                  <a:lnTo>
-                    <a:pt x="6374404" y="1577421"/>
-                  </a:lnTo>
-                  <a:lnTo>
-                    <a:pt x="6302782" y="1573967"/>
-                  </a:lnTo>
-                  <a:lnTo>
-                    <a:pt x="6231159" y="1570301"/>
-                  </a:lnTo>
-                  <a:lnTo>
-                    <a:pt x="6159537" y="1566410"/>
-                  </a:lnTo>
-                  <a:lnTo>
-                    <a:pt x="6087914" y="1562279"/>
-                  </a:lnTo>
-                  <a:lnTo>
-                    <a:pt x="6016292" y="1557894"/>
-                  </a:lnTo>
-                  <a:lnTo>
-                    <a:pt x="5944669" y="1553240"/>
-                  </a:lnTo>
-                  <a:lnTo>
-                    <a:pt x="5873047" y="1548300"/>
-                  </a:lnTo>
-                  <a:lnTo>
-                    <a:pt x="5801424" y="1543057"/>
-                  </a:lnTo>
-                  <a:lnTo>
-                    <a:pt x="5729802" y="1537491"/>
-                  </a:lnTo>
-                  <a:lnTo>
-                    <a:pt x="5658179" y="1531584"/>
-                  </a:lnTo>
-                  <a:lnTo>
-                    <a:pt x="5586557" y="1525313"/>
-                  </a:lnTo>
-                  <a:lnTo>
-                    <a:pt x="5514934" y="1518657"/>
-                  </a:lnTo>
-                  <a:lnTo>
-                    <a:pt x="5443311" y="1511592"/>
-                  </a:lnTo>
-                  <a:lnTo>
-                    <a:pt x="5371689" y="1504093"/>
-                  </a:lnTo>
-                  <a:lnTo>
-                    <a:pt x="5300066" y="1496133"/>
-                  </a:lnTo>
-                  <a:lnTo>
-                    <a:pt x="5228444" y="1487684"/>
-                  </a:lnTo>
-                  <a:lnTo>
-                    <a:pt x="5156821" y="1478716"/>
-                  </a:lnTo>
-                  <a:lnTo>
-                    <a:pt x="5085199" y="1469196"/>
-                  </a:lnTo>
-                  <a:lnTo>
-                    <a:pt x="5013576" y="1459092"/>
-                  </a:lnTo>
-                  <a:lnTo>
-                    <a:pt x="4941954" y="1448367"/>
-                  </a:lnTo>
-                  <a:lnTo>
-                    <a:pt x="4870331" y="1436983"/>
-                  </a:lnTo>
-                  <a:lnTo>
-                    <a:pt x="4798709" y="1424899"/>
-                  </a:lnTo>
-                  <a:lnTo>
-                    <a:pt x="4727086" y="1412073"/>
-                  </a:lnTo>
-                  <a:lnTo>
-                    <a:pt x="4655464" y="1398459"/>
-                  </a:lnTo>
-                  <a:lnTo>
-                    <a:pt x="4583841" y="1384008"/>
-                  </a:lnTo>
-                  <a:lnTo>
-                    <a:pt x="4512219" y="1368669"/>
-                  </a:lnTo>
-                  <a:lnTo>
-                    <a:pt x="4440596" y="1352387"/>
-                  </a:lnTo>
-                  <a:lnTo>
-                    <a:pt x="4368974" y="1335105"/>
-                  </a:lnTo>
-                  <a:lnTo>
-                    <a:pt x="4297351" y="1316761"/>
-                  </a:lnTo>
-                  <a:lnTo>
-                    <a:pt x="4225729" y="1297290"/>
-                  </a:lnTo>
-                  <a:lnTo>
-                    <a:pt x="4154106" y="1276623"/>
-                  </a:lnTo>
-                  <a:lnTo>
-                    <a:pt x="4082483" y="1254685"/>
-                  </a:lnTo>
-                  <a:lnTo>
-                    <a:pt x="4010861" y="1231400"/>
-                  </a:lnTo>
-                  <a:lnTo>
-                    <a:pt x="3939238" y="1206684"/>
-                  </a:lnTo>
-                  <a:lnTo>
-                    <a:pt x="3867616" y="1180448"/>
-                  </a:lnTo>
-                  <a:lnTo>
-                    <a:pt x="3795993" y="1152601"/>
-                  </a:lnTo>
-                  <a:lnTo>
-                    <a:pt x="3724371" y="1123043"/>
-                  </a:lnTo>
-                  <a:lnTo>
-                    <a:pt x="3652748" y="1091668"/>
-                  </a:lnTo>
-                  <a:lnTo>
-                    <a:pt x="3581126" y="1058366"/>
-                  </a:lnTo>
-                  <a:lnTo>
-                    <a:pt x="3509503" y="1023017"/>
-                  </a:lnTo>
-                  <a:lnTo>
-                    <a:pt x="3437881" y="985496"/>
-                  </a:lnTo>
-                  <a:lnTo>
-                    <a:pt x="3366258" y="945669"/>
-                  </a:lnTo>
-                  <a:lnTo>
-                    <a:pt x="3294636" y="903395"/>
-                  </a:lnTo>
-                  <a:lnTo>
-                    <a:pt x="3223013" y="858523"/>
-                  </a:lnTo>
-                  <a:lnTo>
-                    <a:pt x="3151391" y="810895"/>
-                  </a:lnTo>
-                  <a:lnTo>
-                    <a:pt x="3079768" y="793028"/>
-                  </a:lnTo>
-                  <a:lnTo>
-                    <a:pt x="3008146" y="779938"/>
-                  </a:lnTo>
-                  <a:lnTo>
-                    <a:pt x="2936523" y="766644"/>
-                  </a:lnTo>
-                  <a:lnTo>
-                    <a:pt x="2864901" y="753143"/>
-                  </a:lnTo>
-                  <a:lnTo>
-                    <a:pt x="2793278" y="739432"/>
-                  </a:lnTo>
-                  <a:lnTo>
-                    <a:pt x="2721655" y="725507"/>
-                  </a:lnTo>
-                  <a:lnTo>
-                    <a:pt x="2650033" y="711366"/>
-                  </a:lnTo>
-                  <a:lnTo>
-                    <a:pt x="2578410" y="697004"/>
-                  </a:lnTo>
-                  <a:lnTo>
-                    <a:pt x="2506788" y="682419"/>
-                  </a:lnTo>
-                  <a:lnTo>
-                    <a:pt x="2435165" y="667607"/>
-                  </a:lnTo>
-                  <a:lnTo>
-                    <a:pt x="2363543" y="652564"/>
-                  </a:lnTo>
-                  <a:lnTo>
-                    <a:pt x="2291920" y="637286"/>
-                  </a:lnTo>
-                  <a:lnTo>
-                    <a:pt x="2220298" y="621771"/>
-                  </a:lnTo>
-                  <a:lnTo>
-                    <a:pt x="2148675" y="606014"/>
-                  </a:lnTo>
-                  <a:lnTo>
-                    <a:pt x="2077053" y="590012"/>
-                  </a:lnTo>
-                  <a:lnTo>
-                    <a:pt x="2005430" y="573761"/>
-                  </a:lnTo>
-                  <a:lnTo>
-                    <a:pt x="1933808" y="557256"/>
-                  </a:lnTo>
-                  <a:lnTo>
-                    <a:pt x="1862185" y="540495"/>
-                  </a:lnTo>
-                  <a:lnTo>
-                    <a:pt x="1790563" y="523473"/>
-                  </a:lnTo>
-                  <a:lnTo>
-                    <a:pt x="1718940" y="506185"/>
-                  </a:lnTo>
-                  <a:lnTo>
-                    <a:pt x="1647318" y="488628"/>
-                  </a:lnTo>
-                  <a:lnTo>
-                    <a:pt x="1575695" y="470798"/>
-                  </a:lnTo>
-                  <a:lnTo>
-                    <a:pt x="1504073" y="452690"/>
-                  </a:lnTo>
-                  <a:lnTo>
-                    <a:pt x="1432450" y="434301"/>
-                  </a:lnTo>
-                  <a:lnTo>
-                    <a:pt x="1360827" y="415625"/>
-                  </a:lnTo>
-                  <a:lnTo>
-                    <a:pt x="1289205" y="396658"/>
-                  </a:lnTo>
-                  <a:lnTo>
-                    <a:pt x="1217582" y="377395"/>
-                  </a:lnTo>
-                  <a:lnTo>
-                    <a:pt x="1145960" y="357833"/>
-                  </a:lnTo>
-                  <a:lnTo>
-                    <a:pt x="1074337" y="337966"/>
-                  </a:lnTo>
-                  <a:lnTo>
-                    <a:pt x="1002715" y="317790"/>
-                  </a:lnTo>
-                  <a:lnTo>
-                    <a:pt x="931092" y="297300"/>
-                  </a:lnTo>
-                  <a:lnTo>
-                    <a:pt x="859470" y="276490"/>
-                  </a:lnTo>
-                  <a:lnTo>
-                    <a:pt x="787847" y="255357"/>
-                  </a:lnTo>
-                  <a:lnTo>
-                    <a:pt x="716225" y="233894"/>
-                  </a:lnTo>
-                  <a:lnTo>
-                    <a:pt x="644602" y="212097"/>
-                  </a:lnTo>
-                  <a:lnTo>
-                    <a:pt x="572980" y="189961"/>
-                  </a:lnTo>
-                  <a:lnTo>
-                    <a:pt x="501357" y="167480"/>
-                  </a:lnTo>
-                  <a:lnTo>
-                    <a:pt x="429735" y="144649"/>
-                  </a:lnTo>
-                  <a:lnTo>
-                    <a:pt x="358112" y="121462"/>
-                  </a:lnTo>
-                  <a:lnTo>
-                    <a:pt x="286490" y="97915"/>
-                  </a:lnTo>
-                  <a:lnTo>
-                    <a:pt x="214867" y="74000"/>
-                  </a:lnTo>
-                  <a:lnTo>
-                    <a:pt x="143245" y="49713"/>
-                  </a:lnTo>
-                  <a:lnTo>
-                    <a:pt x="71622" y="25049"/>
+                    <a:pt x="7019007" y="1699653"/>
+                  </a:lnTo>
+                  <a:lnTo>
+                    <a:pt x="6947385" y="1697710"/>
+                  </a:lnTo>
+                  <a:lnTo>
+                    <a:pt x="6875762" y="1695646"/>
+                  </a:lnTo>
+                  <a:lnTo>
+                    <a:pt x="6804139" y="1693452"/>
+                  </a:lnTo>
+                  <a:lnTo>
+                    <a:pt x="6732517" y="1691121"/>
+                  </a:lnTo>
+                  <a:lnTo>
+                    <a:pt x="6660894" y="1688645"/>
+                  </a:lnTo>
+                  <a:lnTo>
+                    <a:pt x="6589272" y="1686013"/>
+                  </a:lnTo>
+                  <a:lnTo>
+                    <a:pt x="6517649" y="1683217"/>
+                  </a:lnTo>
+                  <a:lnTo>
+                    <a:pt x="6446027" y="1680245"/>
+                  </a:lnTo>
+                  <a:lnTo>
+                    <a:pt x="6374404" y="1677088"/>
+                  </a:lnTo>
+                  <a:lnTo>
+                    <a:pt x="6302782" y="1673733"/>
+                  </a:lnTo>
+                  <a:lnTo>
+                    <a:pt x="6231159" y="1670169"/>
+                  </a:lnTo>
+                  <a:lnTo>
+                    <a:pt x="6159537" y="1666381"/>
+                  </a:lnTo>
+                  <a:lnTo>
+                    <a:pt x="6087914" y="1662357"/>
+                  </a:lnTo>
+                  <a:lnTo>
+                    <a:pt x="6016292" y="1658080"/>
+                  </a:lnTo>
+                  <a:lnTo>
+                    <a:pt x="5944669" y="1653537"/>
+                  </a:lnTo>
+                  <a:lnTo>
+                    <a:pt x="5873047" y="1648708"/>
+                  </a:lnTo>
+                  <a:lnTo>
+                    <a:pt x="5801424" y="1643578"/>
+                  </a:lnTo>
+                  <a:lnTo>
+                    <a:pt x="5729802" y="1638127"/>
+                  </a:lnTo>
+                  <a:lnTo>
+                    <a:pt x="5658179" y="1632335"/>
+                  </a:lnTo>
+                  <a:lnTo>
+                    <a:pt x="5586557" y="1626180"/>
+                  </a:lnTo>
+                  <a:lnTo>
+                    <a:pt x="5514934" y="1619641"/>
+                  </a:lnTo>
+                  <a:lnTo>
+                    <a:pt x="5443311" y="1612692"/>
+                  </a:lnTo>
+                  <a:lnTo>
+                    <a:pt x="5371689" y="1605308"/>
+                  </a:lnTo>
+                  <a:lnTo>
+                    <a:pt x="5300066" y="1597463"/>
+                  </a:lnTo>
+                  <a:lnTo>
+                    <a:pt x="5228444" y="1589127"/>
+                  </a:lnTo>
+                  <a:lnTo>
+                    <a:pt x="5156821" y="1580269"/>
+                  </a:lnTo>
+                  <a:lnTo>
+                    <a:pt x="5085199" y="1570857"/>
+                  </a:lnTo>
+                  <a:lnTo>
+                    <a:pt x="5013576" y="1560856"/>
+                  </a:lnTo>
+                  <a:lnTo>
+                    <a:pt x="4941954" y="1550230"/>
+                  </a:lnTo>
+                  <a:lnTo>
+                    <a:pt x="4870331" y="1538938"/>
+                  </a:lnTo>
+                  <a:lnTo>
+                    <a:pt x="4798709" y="1526941"/>
+                  </a:lnTo>
+                  <a:lnTo>
+                    <a:pt x="4727086" y="1514192"/>
+                  </a:lnTo>
+                  <a:lnTo>
+                    <a:pt x="4655464" y="1500647"/>
+                  </a:lnTo>
+                  <a:lnTo>
+                    <a:pt x="4583841" y="1486253"/>
+                  </a:lnTo>
+                  <a:lnTo>
+                    <a:pt x="4512219" y="1470959"/>
+                  </a:lnTo>
+                  <a:lnTo>
+                    <a:pt x="4440596" y="1454709"/>
+                  </a:lnTo>
+                  <a:lnTo>
+                    <a:pt x="4368974" y="1437441"/>
+                  </a:lnTo>
+                  <a:lnTo>
+                    <a:pt x="4297351" y="1419094"/>
+                  </a:lnTo>
+                  <a:lnTo>
+                    <a:pt x="4225729" y="1399598"/>
+                  </a:lnTo>
+                  <a:lnTo>
+                    <a:pt x="4154106" y="1378883"/>
+                  </a:lnTo>
+                  <a:lnTo>
+                    <a:pt x="4082483" y="1356872"/>
+                  </a:lnTo>
+                  <a:lnTo>
+                    <a:pt x="4010861" y="1333484"/>
+                  </a:lnTo>
+                  <a:lnTo>
+                    <a:pt x="3939238" y="1308632"/>
+                  </a:lnTo>
+                  <a:lnTo>
+                    <a:pt x="3867616" y="1282226"/>
+                  </a:lnTo>
+                  <a:lnTo>
+                    <a:pt x="3795993" y="1254167"/>
+                  </a:lnTo>
+                  <a:lnTo>
+                    <a:pt x="3724371" y="1224354"/>
+                  </a:lnTo>
+                  <a:lnTo>
+                    <a:pt x="3652748" y="1192675"/>
+                  </a:lnTo>
+                  <a:lnTo>
+                    <a:pt x="3581126" y="1159014"/>
+                  </a:lnTo>
+                  <a:lnTo>
+                    <a:pt x="3509503" y="1123247"/>
+                  </a:lnTo>
+                  <a:lnTo>
+                    <a:pt x="3437881" y="1085243"/>
+                  </a:lnTo>
+                  <a:lnTo>
+                    <a:pt x="3366258" y="1044860"/>
+                  </a:lnTo>
+                  <a:lnTo>
+                    <a:pt x="3294636" y="1001952"/>
+                  </a:lnTo>
+                  <a:lnTo>
+                    <a:pt x="3223013" y="956359"/>
+                  </a:lnTo>
+                  <a:lnTo>
+                    <a:pt x="3151391" y="907913"/>
+                  </a:lnTo>
+                  <a:lnTo>
+                    <a:pt x="3079768" y="889100"/>
+                  </a:lnTo>
+                  <a:lnTo>
+                    <a:pt x="3008146" y="874870"/>
+                  </a:lnTo>
+                  <a:lnTo>
+                    <a:pt x="2936523" y="860399"/>
+                  </a:lnTo>
+                  <a:lnTo>
+                    <a:pt x="2864901" y="845684"/>
+                  </a:lnTo>
+                  <a:lnTo>
+                    <a:pt x="2793278" y="830720"/>
+                  </a:lnTo>
+                  <a:lnTo>
+                    <a:pt x="2721655" y="815503"/>
+                  </a:lnTo>
+                  <a:lnTo>
+                    <a:pt x="2650033" y="800028"/>
+                  </a:lnTo>
+                  <a:lnTo>
+                    <a:pt x="2578410" y="784292"/>
+                  </a:lnTo>
+                  <a:lnTo>
+                    <a:pt x="2506788" y="768290"/>
+                  </a:lnTo>
+                  <a:lnTo>
+                    <a:pt x="2435165" y="752018"/>
+                  </a:lnTo>
+                  <a:lnTo>
+                    <a:pt x="2363543" y="735470"/>
+                  </a:lnTo>
+                  <a:lnTo>
+                    <a:pt x="2291920" y="718642"/>
+                  </a:lnTo>
+                  <a:lnTo>
+                    <a:pt x="2220298" y="701530"/>
+                  </a:lnTo>
+                  <a:lnTo>
+                    <a:pt x="2148675" y="684128"/>
+                  </a:lnTo>
+                  <a:lnTo>
+                    <a:pt x="2077053" y="666433"/>
+                  </a:lnTo>
+                  <a:lnTo>
+                    <a:pt x="2005430" y="648438"/>
+                  </a:lnTo>
+                  <a:lnTo>
+                    <a:pt x="1933808" y="630139"/>
+                  </a:lnTo>
+                  <a:lnTo>
+                    <a:pt x="1862185" y="611530"/>
+                  </a:lnTo>
+                  <a:lnTo>
+                    <a:pt x="1790563" y="592607"/>
+                  </a:lnTo>
+                  <a:lnTo>
+                    <a:pt x="1718940" y="573364"/>
+                  </a:lnTo>
+                  <a:lnTo>
+                    <a:pt x="1647318" y="553795"/>
+                  </a:lnTo>
+                  <a:lnTo>
+                    <a:pt x="1575695" y="533896"/>
+                  </a:lnTo>
+                  <a:lnTo>
+                    <a:pt x="1504073" y="513660"/>
+                  </a:lnTo>
+                  <a:lnTo>
+                    <a:pt x="1432450" y="493082"/>
+                  </a:lnTo>
+                  <a:lnTo>
+                    <a:pt x="1360827" y="472156"/>
+                  </a:lnTo>
+                  <a:lnTo>
+                    <a:pt x="1289205" y="450876"/>
+                  </a:lnTo>
+                  <a:lnTo>
+                    <a:pt x="1217582" y="429237"/>
+                  </a:lnTo>
+                  <a:lnTo>
+                    <a:pt x="1145960" y="407231"/>
+                  </a:lnTo>
+                  <a:lnTo>
+                    <a:pt x="1074337" y="384854"/>
+                  </a:lnTo>
+                  <a:lnTo>
+                    <a:pt x="1002715" y="362098"/>
+                  </a:lnTo>
+                  <a:lnTo>
+                    <a:pt x="931092" y="338957"/>
+                  </a:lnTo>
+                  <a:lnTo>
+                    <a:pt x="859470" y="315425"/>
+                  </a:lnTo>
+                  <a:lnTo>
+                    <a:pt x="787847" y="291495"/>
+                  </a:lnTo>
+                  <a:lnTo>
+                    <a:pt x="716225" y="267161"/>
+                  </a:lnTo>
+                  <a:lnTo>
+                    <a:pt x="644602" y="242415"/>
+                  </a:lnTo>
+                  <a:lnTo>
+                    <a:pt x="572980" y="217251"/>
+                  </a:lnTo>
+                  <a:lnTo>
+                    <a:pt x="501357" y="191661"/>
+                  </a:lnTo>
+                  <a:lnTo>
+                    <a:pt x="429735" y="165639"/>
+                  </a:lnTo>
+                  <a:lnTo>
+                    <a:pt x="358112" y="139176"/>
+                  </a:lnTo>
+                  <a:lnTo>
+                    <a:pt x="286490" y="112266"/>
+                  </a:lnTo>
+                  <a:lnTo>
+                    <a:pt x="214867" y="84902"/>
+                  </a:lnTo>
+                  <a:lnTo>
+                    <a:pt x="143245" y="57074"/>
+                  </a:lnTo>
+                  <a:lnTo>
+                    <a:pt x="71622" y="28776"/>
                   </a:lnTo>
                   <a:lnTo>
                     <a:pt x="0" y="0"/>
@@ -4556,297 +4550,294 @@
           </p:nvSpPr>
           <p:spPr>
             <a:xfrm>
-              <a:off x="1576195" y="2073503"/>
-              <a:ext cx="6686484" cy="3379079"/>
+              <a:off x="1659928" y="2073503"/>
+              <a:ext cx="6602750" cy="3385670"/>
             </a:xfrm>
             <a:custGeom>
               <a:avLst/>
               <a:pathLst>
-                <a:path w="6686484" h="3379079">
+                <a:path w="6602750" h="3385670">
                   <a:moveTo>
                     <a:pt x="0" y="0"/>
                   </a:moveTo>
                   <a:lnTo>
-                    <a:pt x="25589" y="46974"/>
-                  </a:lnTo>
-                  <a:lnTo>
-                    <a:pt x="97211" y="173609"/>
-                  </a:lnTo>
-                  <a:lnTo>
-                    <a:pt x="168834" y="295578"/>
-                  </a:lnTo>
-                  <a:lnTo>
-                    <a:pt x="240456" y="413052"/>
-                  </a:lnTo>
-                  <a:lnTo>
-                    <a:pt x="312079" y="526198"/>
-                  </a:lnTo>
-                  <a:lnTo>
-                    <a:pt x="383701" y="635175"/>
-                  </a:lnTo>
-                  <a:lnTo>
-                    <a:pt x="455324" y="740136"/>
-                  </a:lnTo>
-                  <a:lnTo>
-                    <a:pt x="526946" y="841230"/>
-                  </a:lnTo>
-                  <a:lnTo>
-                    <a:pt x="598569" y="938599"/>
-                  </a:lnTo>
-                  <a:lnTo>
-                    <a:pt x="670191" y="1032380"/>
-                  </a:lnTo>
-                  <a:lnTo>
-                    <a:pt x="741814" y="1122706"/>
-                  </a:lnTo>
-                  <a:lnTo>
-                    <a:pt x="813436" y="1209703"/>
-                  </a:lnTo>
-                  <a:lnTo>
-                    <a:pt x="885059" y="1293495"/>
-                  </a:lnTo>
-                  <a:lnTo>
-                    <a:pt x="956681" y="1374199"/>
-                  </a:lnTo>
-                  <a:lnTo>
-                    <a:pt x="1028304" y="1451929"/>
-                  </a:lnTo>
-                  <a:lnTo>
-                    <a:pt x="1099927" y="1526796"/>
-                  </a:lnTo>
-                  <a:lnTo>
-                    <a:pt x="1171549" y="1598904"/>
-                  </a:lnTo>
-                  <a:lnTo>
-                    <a:pt x="1243172" y="1668354"/>
-                  </a:lnTo>
-                  <a:lnTo>
-                    <a:pt x="1314794" y="1735246"/>
-                  </a:lnTo>
-                  <a:lnTo>
-                    <a:pt x="1386417" y="1799673"/>
-                  </a:lnTo>
-                  <a:lnTo>
-                    <a:pt x="1458039" y="1861726"/>
-                  </a:lnTo>
-                  <a:lnTo>
-                    <a:pt x="1529662" y="1921493"/>
-                  </a:lnTo>
-                  <a:lnTo>
-                    <a:pt x="1601284" y="1979057"/>
-                  </a:lnTo>
-                  <a:lnTo>
-                    <a:pt x="1672907" y="2034500"/>
-                  </a:lnTo>
-                  <a:lnTo>
-                    <a:pt x="1744529" y="2087901"/>
-                  </a:lnTo>
-                  <a:lnTo>
-                    <a:pt x="1816152" y="2139334"/>
-                  </a:lnTo>
-                  <a:lnTo>
-                    <a:pt x="1887774" y="2188871"/>
-                  </a:lnTo>
-                  <a:lnTo>
-                    <a:pt x="1959397" y="2236583"/>
-                  </a:lnTo>
-                  <a:lnTo>
-                    <a:pt x="2031019" y="2282538"/>
-                  </a:lnTo>
-                  <a:lnTo>
-                    <a:pt x="2102642" y="2326799"/>
-                  </a:lnTo>
-                  <a:lnTo>
-                    <a:pt x="2174264" y="2369429"/>
-                  </a:lnTo>
-                  <a:lnTo>
-                    <a:pt x="2245887" y="2410488"/>
-                  </a:lnTo>
-                  <a:lnTo>
-                    <a:pt x="2317509" y="2450034"/>
-                  </a:lnTo>
-                  <a:lnTo>
-                    <a:pt x="2389132" y="2488124"/>
-                  </a:lnTo>
-                  <a:lnTo>
-                    <a:pt x="2460755" y="2524809"/>
-                  </a:lnTo>
-                  <a:lnTo>
-                    <a:pt x="2532377" y="2560143"/>
-                  </a:lnTo>
-                  <a:lnTo>
-                    <a:pt x="2604000" y="2594175"/>
-                  </a:lnTo>
-                  <a:lnTo>
-                    <a:pt x="2675622" y="2626953"/>
-                  </a:lnTo>
-                  <a:lnTo>
-                    <a:pt x="2747245" y="2658524"/>
-                  </a:lnTo>
-                  <a:lnTo>
-                    <a:pt x="2818867" y="2688931"/>
-                  </a:lnTo>
-                  <a:lnTo>
-                    <a:pt x="2890490" y="2718217"/>
-                  </a:lnTo>
-                  <a:lnTo>
-                    <a:pt x="2962112" y="2746425"/>
-                  </a:lnTo>
-                  <a:lnTo>
-                    <a:pt x="3033735" y="2773593"/>
-                  </a:lnTo>
-                  <a:lnTo>
-                    <a:pt x="3105357" y="2799760"/>
-                  </a:lnTo>
-                  <a:lnTo>
-                    <a:pt x="3176980" y="2824963"/>
-                  </a:lnTo>
-                  <a:lnTo>
-                    <a:pt x="3248602" y="2849237"/>
-                  </a:lnTo>
-                  <a:lnTo>
-                    <a:pt x="3320225" y="2872617"/>
-                  </a:lnTo>
-                  <a:lnTo>
-                    <a:pt x="3391847" y="2895135"/>
-                  </a:lnTo>
-                  <a:lnTo>
-                    <a:pt x="3463470" y="2916824"/>
-                  </a:lnTo>
-                  <a:lnTo>
-                    <a:pt x="3535092" y="2937713"/>
-                  </a:lnTo>
-                  <a:lnTo>
-                    <a:pt x="3606715" y="2957833"/>
-                  </a:lnTo>
-                  <a:lnTo>
-                    <a:pt x="3678337" y="2977211"/>
-                  </a:lnTo>
-                  <a:lnTo>
-                    <a:pt x="3749960" y="2995875"/>
-                  </a:lnTo>
-                  <a:lnTo>
-                    <a:pt x="3821583" y="3013852"/>
-                  </a:lnTo>
-                  <a:lnTo>
-                    <a:pt x="3893205" y="3031166"/>
-                  </a:lnTo>
-                  <a:lnTo>
-                    <a:pt x="3964828" y="3047842"/>
-                  </a:lnTo>
-                  <a:lnTo>
-                    <a:pt x="4036450" y="3063904"/>
-                  </a:lnTo>
-                  <a:lnTo>
-                    <a:pt x="4108073" y="3079374"/>
-                  </a:lnTo>
-                  <a:lnTo>
-                    <a:pt x="4179695" y="3094274"/>
-                  </a:lnTo>
-                  <a:lnTo>
-                    <a:pt x="4251318" y="3108625"/>
-                  </a:lnTo>
-                  <a:lnTo>
-                    <a:pt x="4322940" y="3122447"/>
-                  </a:lnTo>
-                  <a:lnTo>
-                    <a:pt x="4394563" y="3135760"/>
-                  </a:lnTo>
-                  <a:lnTo>
-                    <a:pt x="4466185" y="3148582"/>
-                  </a:lnTo>
-                  <a:lnTo>
-                    <a:pt x="4537808" y="3160932"/>
-                  </a:lnTo>
-                  <a:lnTo>
-                    <a:pt x="4609430" y="3172827"/>
-                  </a:lnTo>
-                  <a:lnTo>
-                    <a:pt x="4681053" y="3184283"/>
-                  </a:lnTo>
-                  <a:lnTo>
-                    <a:pt x="4752675" y="3195317"/>
-                  </a:lnTo>
-                  <a:lnTo>
-                    <a:pt x="4824298" y="3205945"/>
-                  </a:lnTo>
-                  <a:lnTo>
-                    <a:pt x="4895920" y="3216181"/>
-                  </a:lnTo>
-                  <a:lnTo>
-                    <a:pt x="4967543" y="3226040"/>
-                  </a:lnTo>
-                  <a:lnTo>
-                    <a:pt x="5039165" y="3235536"/>
-                  </a:lnTo>
-                  <a:lnTo>
-                    <a:pt x="5110788" y="3244682"/>
-                  </a:lnTo>
-                  <a:lnTo>
-                    <a:pt x="5182411" y="3253491"/>
-                  </a:lnTo>
-                  <a:lnTo>
-                    <a:pt x="5254033" y="3261975"/>
-                  </a:lnTo>
-                  <a:lnTo>
-                    <a:pt x="5325656" y="3270146"/>
-                  </a:lnTo>
-                  <a:lnTo>
-                    <a:pt x="5397278" y="3278017"/>
-                  </a:lnTo>
-                  <a:lnTo>
-                    <a:pt x="5468901" y="3285597"/>
-                  </a:lnTo>
-                  <a:lnTo>
-                    <a:pt x="5540523" y="3292899"/>
-                  </a:lnTo>
-                  <a:lnTo>
-                    <a:pt x="5612146" y="3299931"/>
-                  </a:lnTo>
-                  <a:lnTo>
-                    <a:pt x="5683768" y="3306704"/>
-                  </a:lnTo>
-                  <a:lnTo>
-                    <a:pt x="5755391" y="3313227"/>
-                  </a:lnTo>
-                  <a:lnTo>
-                    <a:pt x="5827013" y="3319511"/>
-                  </a:lnTo>
-                  <a:lnTo>
-                    <a:pt x="5898636" y="3325562"/>
-                  </a:lnTo>
-                  <a:lnTo>
-                    <a:pt x="5970258" y="3331391"/>
-                  </a:lnTo>
-                  <a:lnTo>
-                    <a:pt x="6041881" y="3337005"/>
-                  </a:lnTo>
-                  <a:lnTo>
-                    <a:pt x="6113503" y="3342412"/>
-                  </a:lnTo>
-                  <a:lnTo>
-                    <a:pt x="6185126" y="3347619"/>
-                  </a:lnTo>
-                  <a:lnTo>
-                    <a:pt x="6256748" y="3352635"/>
-                  </a:lnTo>
-                  <a:lnTo>
-                    <a:pt x="6328371" y="3357466"/>
-                  </a:lnTo>
-                  <a:lnTo>
-                    <a:pt x="6399993" y="3362119"/>
-                  </a:lnTo>
-                  <a:lnTo>
-                    <a:pt x="6471616" y="3366601"/>
-                  </a:lnTo>
-                  <a:lnTo>
-                    <a:pt x="6543239" y="3370917"/>
-                  </a:lnTo>
-                  <a:lnTo>
-                    <a:pt x="6614861" y="3375075"/>
-                  </a:lnTo>
-                  <a:lnTo>
-                    <a:pt x="6686484" y="3379079"/>
+                    <a:pt x="13478" y="25695"/>
+                  </a:lnTo>
+                  <a:lnTo>
+                    <a:pt x="85101" y="157049"/>
+                  </a:lnTo>
+                  <a:lnTo>
+                    <a:pt x="156723" y="283413"/>
+                  </a:lnTo>
+                  <a:lnTo>
+                    <a:pt x="228346" y="404978"/>
+                  </a:lnTo>
+                  <a:lnTo>
+                    <a:pt x="299968" y="521925"/>
+                  </a:lnTo>
+                  <a:lnTo>
+                    <a:pt x="371591" y="634429"/>
+                  </a:lnTo>
+                  <a:lnTo>
+                    <a:pt x="443213" y="742660"/>
+                  </a:lnTo>
+                  <a:lnTo>
+                    <a:pt x="514836" y="846780"/>
+                  </a:lnTo>
+                  <a:lnTo>
+                    <a:pt x="586458" y="946945"/>
+                  </a:lnTo>
+                  <a:lnTo>
+                    <a:pt x="658081" y="1043306"/>
+                  </a:lnTo>
+                  <a:lnTo>
+                    <a:pt x="729703" y="1136006"/>
+                  </a:lnTo>
+                  <a:lnTo>
+                    <a:pt x="801326" y="1225185"/>
+                  </a:lnTo>
+                  <a:lnTo>
+                    <a:pt x="872948" y="1310976"/>
+                  </a:lnTo>
+                  <a:lnTo>
+                    <a:pt x="944571" y="1393509"/>
+                  </a:lnTo>
+                  <a:lnTo>
+                    <a:pt x="1016193" y="1472906"/>
+                  </a:lnTo>
+                  <a:lnTo>
+                    <a:pt x="1087816" y="1549288"/>
+                  </a:lnTo>
+                  <a:lnTo>
+                    <a:pt x="1159438" y="1622768"/>
+                  </a:lnTo>
+                  <a:lnTo>
+                    <a:pt x="1231061" y="1693457"/>
+                  </a:lnTo>
+                  <a:lnTo>
+                    <a:pt x="1302684" y="1761461"/>
+                  </a:lnTo>
+                  <a:lnTo>
+                    <a:pt x="1374306" y="1826882"/>
+                  </a:lnTo>
+                  <a:lnTo>
+                    <a:pt x="1445929" y="1889818"/>
+                  </a:lnTo>
+                  <a:lnTo>
+                    <a:pt x="1517551" y="1950363"/>
+                  </a:lnTo>
+                  <a:lnTo>
+                    <a:pt x="1589174" y="2008609"/>
+                  </a:lnTo>
+                  <a:lnTo>
+                    <a:pt x="1660796" y="2064642"/>
+                  </a:lnTo>
+                  <a:lnTo>
+                    <a:pt x="1732419" y="2118547"/>
+                  </a:lnTo>
+                  <a:lnTo>
+                    <a:pt x="1804041" y="2170404"/>
+                  </a:lnTo>
+                  <a:lnTo>
+                    <a:pt x="1875664" y="2220291"/>
+                  </a:lnTo>
+                  <a:lnTo>
+                    <a:pt x="1947286" y="2268283"/>
+                  </a:lnTo>
+                  <a:lnTo>
+                    <a:pt x="2018909" y="2314452"/>
+                  </a:lnTo>
+                  <a:lnTo>
+                    <a:pt x="2090531" y="2358868"/>
+                  </a:lnTo>
+                  <a:lnTo>
+                    <a:pt x="2162154" y="2401596"/>
+                  </a:lnTo>
+                  <a:lnTo>
+                    <a:pt x="2233776" y="2442702"/>
+                  </a:lnTo>
+                  <a:lnTo>
+                    <a:pt x="2305399" y="2482246"/>
+                  </a:lnTo>
+                  <a:lnTo>
+                    <a:pt x="2377021" y="2520288"/>
+                  </a:lnTo>
+                  <a:lnTo>
+                    <a:pt x="2448644" y="2556885"/>
+                  </a:lnTo>
+                  <a:lnTo>
+                    <a:pt x="2520266" y="2592092"/>
+                  </a:lnTo>
+                  <a:lnTo>
+                    <a:pt x="2591889" y="2625961"/>
+                  </a:lnTo>
+                  <a:lnTo>
+                    <a:pt x="2663512" y="2658544"/>
+                  </a:lnTo>
+                  <a:lnTo>
+                    <a:pt x="2735134" y="2689889"/>
+                  </a:lnTo>
+                  <a:lnTo>
+                    <a:pt x="2806757" y="2720044"/>
+                  </a:lnTo>
+                  <a:lnTo>
+                    <a:pt x="2878379" y="2749053"/>
+                  </a:lnTo>
+                  <a:lnTo>
+                    <a:pt x="2950002" y="2776960"/>
+                  </a:lnTo>
+                  <a:lnTo>
+                    <a:pt x="3021624" y="2803808"/>
+                  </a:lnTo>
+                  <a:lnTo>
+                    <a:pt x="3093247" y="2829635"/>
+                  </a:lnTo>
+                  <a:lnTo>
+                    <a:pt x="3164869" y="2854481"/>
+                  </a:lnTo>
+                  <a:lnTo>
+                    <a:pt x="3236492" y="2878384"/>
+                  </a:lnTo>
+                  <a:lnTo>
+                    <a:pt x="3308114" y="2901379"/>
+                  </a:lnTo>
+                  <a:lnTo>
+                    <a:pt x="3379737" y="2923500"/>
+                  </a:lnTo>
+                  <a:lnTo>
+                    <a:pt x="3451359" y="2944781"/>
+                  </a:lnTo>
+                  <a:lnTo>
+                    <a:pt x="3522982" y="2965253"/>
+                  </a:lnTo>
+                  <a:lnTo>
+                    <a:pt x="3594604" y="2984948"/>
+                  </a:lnTo>
+                  <a:lnTo>
+                    <a:pt x="3666227" y="3003895"/>
+                  </a:lnTo>
+                  <a:lnTo>
+                    <a:pt x="3737849" y="3022122"/>
+                  </a:lnTo>
+                  <a:lnTo>
+                    <a:pt x="3809472" y="3039657"/>
+                  </a:lnTo>
+                  <a:lnTo>
+                    <a:pt x="3881094" y="3056526"/>
+                  </a:lnTo>
+                  <a:lnTo>
+                    <a:pt x="3952717" y="3072754"/>
+                  </a:lnTo>
+                  <a:lnTo>
+                    <a:pt x="4024340" y="3088365"/>
+                  </a:lnTo>
+                  <a:lnTo>
+                    <a:pt x="4095962" y="3103384"/>
+                  </a:lnTo>
+                  <a:lnTo>
+                    <a:pt x="4167585" y="3117832"/>
+                  </a:lnTo>
+                  <a:lnTo>
+                    <a:pt x="4239207" y="3131731"/>
+                  </a:lnTo>
+                  <a:lnTo>
+                    <a:pt x="4310830" y="3145102"/>
+                  </a:lnTo>
+                  <a:lnTo>
+                    <a:pt x="4382452" y="3157966"/>
+                  </a:lnTo>
+                  <a:lnTo>
+                    <a:pt x="4454075" y="3170341"/>
+                  </a:lnTo>
+                  <a:lnTo>
+                    <a:pt x="4525697" y="3182245"/>
+                  </a:lnTo>
+                  <a:lnTo>
+                    <a:pt x="4597320" y="3193698"/>
+                  </a:lnTo>
+                  <a:lnTo>
+                    <a:pt x="4668942" y="3204715"/>
+                  </a:lnTo>
+                  <a:lnTo>
+                    <a:pt x="4740565" y="3215314"/>
+                  </a:lnTo>
+                  <a:lnTo>
+                    <a:pt x="4812187" y="3225511"/>
+                  </a:lnTo>
+                  <a:lnTo>
+                    <a:pt x="4883810" y="3235320"/>
+                  </a:lnTo>
+                  <a:lnTo>
+                    <a:pt x="4955432" y="3244756"/>
+                  </a:lnTo>
+                  <a:lnTo>
+                    <a:pt x="5027055" y="3253834"/>
+                  </a:lnTo>
+                  <a:lnTo>
+                    <a:pt x="5098677" y="3262567"/>
+                  </a:lnTo>
+                  <a:lnTo>
+                    <a:pt x="5170300" y="3270969"/>
+                  </a:lnTo>
+                  <a:lnTo>
+                    <a:pt x="5241922" y="3279051"/>
+                  </a:lnTo>
+                  <a:lnTo>
+                    <a:pt x="5313545" y="3286827"/>
+                  </a:lnTo>
+                  <a:lnTo>
+                    <a:pt x="5385168" y="3294307"/>
+                  </a:lnTo>
+                  <a:lnTo>
+                    <a:pt x="5456790" y="3301502"/>
+                  </a:lnTo>
+                  <a:lnTo>
+                    <a:pt x="5528413" y="3308425"/>
+                  </a:lnTo>
+                  <a:lnTo>
+                    <a:pt x="5600035" y="3315084"/>
+                  </a:lnTo>
+                  <a:lnTo>
+                    <a:pt x="5671658" y="3321491"/>
+                  </a:lnTo>
+                  <a:lnTo>
+                    <a:pt x="5743280" y="3327654"/>
+                  </a:lnTo>
+                  <a:lnTo>
+                    <a:pt x="5814903" y="3333584"/>
+                  </a:lnTo>
+                  <a:lnTo>
+                    <a:pt x="5886525" y="3339287"/>
+                  </a:lnTo>
+                  <a:lnTo>
+                    <a:pt x="5958148" y="3344775"/>
+                  </a:lnTo>
+                  <a:lnTo>
+                    <a:pt x="6029770" y="3350054"/>
+                  </a:lnTo>
+                  <a:lnTo>
+                    <a:pt x="6101393" y="3355132"/>
+                  </a:lnTo>
+                  <a:lnTo>
+                    <a:pt x="6173015" y="3360017"/>
+                  </a:lnTo>
+                  <a:lnTo>
+                    <a:pt x="6244638" y="3364717"/>
+                  </a:lnTo>
+                  <a:lnTo>
+                    <a:pt x="6316260" y="3369238"/>
+                  </a:lnTo>
+                  <a:lnTo>
+                    <a:pt x="6387883" y="3373588"/>
+                  </a:lnTo>
+                  <a:lnTo>
+                    <a:pt x="6459505" y="3377772"/>
+                  </a:lnTo>
+                  <a:lnTo>
+                    <a:pt x="6531128" y="3381798"/>
+                  </a:lnTo>
+                  <a:lnTo>
+                    <a:pt x="6602750" y="3385670"/>
                   </a:lnTo>
                 </a:path>
               </a:pathLst>
@@ -4918,7 +4909,7 @@
           </p:nvSpPr>
           <p:spPr>
             <a:xfrm>
-              <a:off x="4313661" y="2073503"/>
+              <a:off x="4313914" y="2073503"/>
               <a:ext cx="0" cy="3649639"/>
             </a:xfrm>
             <a:custGeom>
@@ -5191,7 +5182,7 @@
           </p:nvSpPr>
           <p:spPr>
             <a:xfrm>
-              <a:off x="1343342" y="5785772"/>
+              <a:off x="1344940" y="5785772"/>
               <a:ext cx="161574" cy="80101"/>
             </a:xfrm>
             <a:prstGeom prst="rect">
@@ -5237,7 +5228,7 @@
           </p:nvSpPr>
           <p:spPr>
             <a:xfrm>
-              <a:off x="2280620" y="5785772"/>
+              <a:off x="2281218" y="5785772"/>
               <a:ext cx="161574" cy="80101"/>
             </a:xfrm>
             <a:prstGeom prst="rect">
@@ -5283,7 +5274,7 @@
           </p:nvSpPr>
           <p:spPr>
             <a:xfrm>
-              <a:off x="3217897" y="5785772"/>
+              <a:off x="3217496" y="5785772"/>
               <a:ext cx="161574" cy="80101"/>
             </a:xfrm>
             <a:prstGeom prst="rect">
@@ -5329,7 +5320,7 @@
           </p:nvSpPr>
           <p:spPr>
             <a:xfrm>
-              <a:off x="4204872" y="5785772"/>
+              <a:off x="4203472" y="5785772"/>
               <a:ext cx="62179" cy="80101"/>
             </a:xfrm>
             <a:prstGeom prst="rect">
@@ -5375,7 +5366,7 @@
           </p:nvSpPr>
           <p:spPr>
             <a:xfrm>
-              <a:off x="5111060" y="5785772"/>
+              <a:off x="5108660" y="5785772"/>
               <a:ext cx="124358" cy="80101"/>
             </a:xfrm>
             <a:prstGeom prst="rect">
@@ -5421,7 +5412,7 @@
           </p:nvSpPr>
           <p:spPr>
             <a:xfrm>
-              <a:off x="6048338" y="5785772"/>
+              <a:off x="6044938" y="5785772"/>
               <a:ext cx="124358" cy="80101"/>
             </a:xfrm>
             <a:prstGeom prst="rect">
@@ -5467,7 +5458,7 @@
           </p:nvSpPr>
           <p:spPr>
             <a:xfrm>
-              <a:off x="6985615" y="5785772"/>
+              <a:off x="6981216" y="5785772"/>
               <a:ext cx="124358" cy="80101"/>
             </a:xfrm>
             <a:prstGeom prst="rect">
@@ -5513,7 +5504,7 @@
           </p:nvSpPr>
           <p:spPr>
             <a:xfrm>
-              <a:off x="7922893" y="5785772"/>
+              <a:off x="7917494" y="5785772"/>
               <a:ext cx="124358" cy="80101"/>
             </a:xfrm>
             <a:prstGeom prst="rect">
@@ -5684,7 +5675,7 @@
                   <a:latin typeface="Helvetica"/>
                   <a:cs typeface="Helvetica"/>
                 </a:rPr>
-                <a:t>subHR per 10 % decline: 1.63 (1.22-2.18), p_Bonf = 0.005 (n = 6)  |  per IQR decline (Δ = 25.8 %): 3.56 (1.69-7.51)  |  IQR: [-10.7, 15.1] %</a:t>
+                <a:t>subHR per 10 % decline: 1.66 (1.25-2.21), p_Bonf = 0.003 (n = 6)  |  per IQR decline (Δ = 25.8 %): 3.69 (1.76-7.75)  |  IQR: [-10.6, 15.2] %</a:t>
               </a:r>
             </a:p>
           </p:txBody>
